--- a/en/slides/05-Computer_Architecture-Number_Representation_Integers.pptx
+++ b/en/slides/05-Computer_Architecture-Number_Representation_Integers.pptx
@@ -126,13 +126,13 @@
   <p:extLst>
     <p:ext uri="{521415D9-36F7-43E2-AB2F-B90AF26B5E84}">
       <p14:sectionLst xmlns:p14="http://schemas.microsoft.com/office/powerpoint/2010/main">
-        <p14:section name="Opening" id="{197cf46e-1bdf-f98f-4b97-b2ea56a16072}">
+        <p14:section name="Opening" id="{651100ee-5806-5d54-8337-7ed7a15dd7fa}">
           <p14:sldIdLst>
             <p14:sldId id="256"/>
             <p14:sldId id="257"/>
           </p14:sldIdLst>
         </p14:section>
-        <p14:section name="Bases and conversions" id="{8092fbc1-a9b2-c7ab-b80f-c58a6312f2dd}">
+        <p14:section name="Bases and conversions" id="{c314dfce-c8dd-f13c-4674-aaeec8028a1b}">
           <p14:sldIdLst>
             <p14:sldId id="258"/>
             <p14:sldId id="259"/>
@@ -140,14 +140,14 @@
             <p14:sldId id="261"/>
           </p14:sldIdLst>
         </p14:section>
-        <p14:section name="Natural numbers and overflow" id="{12e07036-2744-71f3-ab77-2ccd2df5c48c}">
+        <p14:section name="Natural numbers and overflow" id="{d610a5b9-792e-4cf0-ecc3-70174409384d}">
           <p14:sldIdLst>
             <p14:sldId id="262"/>
             <p14:sldId id="263"/>
             <p14:sldId id="264"/>
           </p14:sldIdLst>
         </p14:section>
-        <p14:section name="Signed integers" id="{abd4f844-65a3-912f-fcb5-604a9b3669f7}">
+        <p14:section name="Signed integers" id="{0d93d285-4613-f4d1-ef30-fa40a173c8f9}">
           <p14:sldIdLst>
             <p14:sldId id="265"/>
             <p14:sldId id="266"/>
@@ -157,7 +157,7 @@
             <p14:sldId id="270"/>
           </p14:sldIdLst>
         </p14:section>
-        <p14:section name="Back to the machine" id="{e4bde23f-d84d-b4b5-c037-b8c7604e8312}">
+        <p14:section name="Back to the machine" id="{f2f2aa3e-af6b-4a1a-b2b7-c955fde51a4e}">
           <p14:sldIdLst>
             <p14:sldId id="271"/>
             <p14:sldId id="272"/>
@@ -3293,7 +3293,63 @@
       </p:sp>
       <p:sp>
         <p:nvSpPr>
-          <p:cNvPr id="12" name="Shape 10"/>
+          <p:cNvPr id="12" name="Text 10"/>
+          <p:cNvSpPr txBox="1"/>
+          <p:nvPr/>
+        </p:nvSpPr>
+        <p:spPr>
+          <a:xfrm>
+            <a:off x="4693615" y="566928"/>
+            <a:ext cx="6949440" cy="640080"/>
+          </a:xfrm>
+          <a:prstGeom prst="rect">
+            <a:avLst/>
+          </a:prstGeom>
+          <a:noFill/>
+          <a:ln/>
+        </p:spPr>
+        <p:txBody>
+          <a:bodyPr wrap="square" lIns="0" tIns="0" rIns="0" bIns="0" rtlCol="0" anchor="t"/>
+          <a:lstStyle/>
+          <a:p>
+            <a:pPr algn="r" indent="0" marL="0">
+              <a:buNone/>
+            </a:pPr>
+            <a:r>
+              <a:rPr lang="en-US" sz="1300" dirty="0">
+                <a:solidFill>
+                  <a:srgbClr val="CFE3EA"/>
+                </a:solidFill>
+                <a:latin typeface="Calibri" pitchFamily="34" charset="0"/>
+                <a:ea typeface="Calibri" pitchFamily="34" charset="-122"/>
+                <a:cs typeface="Calibri" pitchFamily="34" charset="-120"/>
+              </a:rPr>
+              <a:t>Lecture deck. The listings, the complete program and how to test it are in the code deck:</a:t>
+            </a:r>
+            <a:endParaRPr lang="en-US" sz="1300" dirty="0"/>
+          </a:p>
+          <a:p>
+            <a:pPr algn="r" indent="0" marL="0">
+              <a:buNone/>
+            </a:pPr>
+            <a:r>
+              <a:rPr lang="en-US" sz="1300" dirty="0">
+                <a:solidFill>
+                  <a:srgbClr val="CFE3EA"/>
+                </a:solidFill>
+                <a:latin typeface="Calibri" pitchFamily="34" charset="0"/>
+                <a:ea typeface="Calibri" pitchFamily="34" charset="-122"/>
+                <a:cs typeface="Calibri" pitchFamily="34" charset="-120"/>
+              </a:rPr>
+              <a:t>05-Computer_Architecture-Number_Representation_Integers-Code.pptx</a:t>
+            </a:r>
+            <a:endParaRPr lang="en-US" sz="1300" dirty="0"/>
+          </a:p>
+        </p:txBody>
+      </p:sp>
+      <p:sp>
+        <p:nvSpPr>
+          <p:cNvPr id="13" name="Shape 11"/>
           <p:cNvSpPr/>
           <p:nvPr/>
         </p:nvSpPr>
@@ -3320,7 +3376,7 @@
       </p:sp>
       <p:pic>
         <p:nvPicPr>
-          <p:cNvPr id="13" name="Image 0" descr="/Users/raffaelemontella/devel/riscv-prg32/computer-architecture-with-prg32/tools/assets/lab2_step2_move.png">    </p:cNvPr>
+          <p:cNvPr id="14" name="Image 0" descr="/Users/raffaelemontella/devel/riscv-prg32/computer-architecture-with-prg32/tools/assets/lab2_step2_move.png">    </p:cNvPr>
           <p:cNvPicPr>
             <a:picLocks noChangeAspect="1"/>
           </p:cNvPicPr>

--- a/en/slides/05-Computer_Architecture-Number_Representation_Integers.pptx
+++ b/en/slides/05-Computer_Architecture-Number_Representation_Integers.pptx
@@ -126,13 +126,13 @@
   <p:extLst>
     <p:ext uri="{521415D9-36F7-43E2-AB2F-B90AF26B5E84}">
       <p14:sectionLst xmlns:p14="http://schemas.microsoft.com/office/powerpoint/2010/main">
-        <p14:section name="Opening" id="{651100ee-5806-5d54-8337-7ed7a15dd7fa}">
+        <p14:section name="Opening" id="{7f894fae-9957-36b8-fd72-e15e6412a0a2}">
           <p14:sldIdLst>
             <p14:sldId id="256"/>
             <p14:sldId id="257"/>
           </p14:sldIdLst>
         </p14:section>
-        <p14:section name="Bases and conversions" id="{c314dfce-c8dd-f13c-4674-aaeec8028a1b}">
+        <p14:section name="Bases and conversions" id="{ec3b870b-163b-c245-4836-8c600ec8c6d7}">
           <p14:sldIdLst>
             <p14:sldId id="258"/>
             <p14:sldId id="259"/>
@@ -140,14 +140,14 @@
             <p14:sldId id="261"/>
           </p14:sldIdLst>
         </p14:section>
-        <p14:section name="Natural numbers and overflow" id="{d610a5b9-792e-4cf0-ecc3-70174409384d}">
+        <p14:section name="Natural numbers and overflow" id="{191c5dcc-f9fe-0e48-1a2e-5af1675787f2}">
           <p14:sldIdLst>
             <p14:sldId id="262"/>
             <p14:sldId id="263"/>
             <p14:sldId id="264"/>
           </p14:sldIdLst>
         </p14:section>
-        <p14:section name="Signed integers" id="{0d93d285-4613-f4d1-ef30-fa40a173c8f9}">
+        <p14:section name="Signed integers" id="{d0db5711-742b-65ef-1a65-3c5f8a7e5e00}">
           <p14:sldIdLst>
             <p14:sldId id="265"/>
             <p14:sldId id="266"/>
@@ -157,7 +157,7 @@
             <p14:sldId id="270"/>
           </p14:sldIdLst>
         </p14:section>
-        <p14:section name="Back to the machine" id="{f2f2aa3e-af6b-4a1a-b2b7-c955fde51a4e}">
+        <p14:section name="Back to the machine" id="{605919bb-a010-f9b2-06c8-32cd9fbccd56}">
           <p14:sldIdLst>
             <p14:sldId id="271"/>
             <p14:sldId id="272"/>
@@ -571,6 +571,8 @@
             <a:r>
               <a:rPr lang="en-US" dirty="0"/>
               <a:t>This lecture begins the formal treatment of numbers. It opens with a small surprise on the machine, a marker that walks left past zero and shows FFFFFFFF, and it ends by explaining exactly why that happens. In between you learn to convert between bases, to say which numbers fit in a given number of bits, and to write negative numbers. The quotation by Trilussa, the One arguing with the Zero, is a reminder that in a positional system even a zero has its weight.
+Learning status: UNDERSTAND NOW, by the end of this lecture you explain it, trace it and apply it on your own; USE NOW, you follow and use the recipe today; how it works inside is explained later, or is not part of the course; UNDERSTAND LATER, recognise the name and what it is for; a later lecture explains it. A slide without a badge is context: a story, an example, a question, an exercise.
+Learning status of this lecture. UNDERSTAND NOW: two's complement; base conversions; naturals and overflow; shifts as multiplications; sign and magnitude; signed or unsigned instructions; sign extension. USE NOW: the PRG32 runtime calls, the complete program, the PRG32 tools (used, not studied, in this course). UNDERSTAND LATER: nothing. A slide without a badge is context: a story, an example, a question, an exercise.
 For the lecturer: Original quotation (Romanesco): «Conterò poco, è vero: - diceva l'Uno ar Zero - ma tu che vali? Gnente: propio gnente.» Spiral: the lecture opens with the marker of textbook lab 06 moving left past zero, and closes by explaining it.</a:t>
             </a:r>
             <a:endParaRPr lang="en-US" dirty="0"/>
@@ -660,6 +662,7 @@
             <a:r>
               <a:rPr lang="en-US" dirty="0"/>
               <a:t>The most natural idea: use the leftmost bit for the sign and the remaining bits for the magnitude. It is easy for a person to read, and it has two defects. Zero has two representations, plus zero and minus zero. And arithmetic is awkward: to add two numbers of opposite sign the circuit must compare the magnitudes, subtract the smaller from the larger and choose the sign. A representation that makes addition complicated is a poor law in the sense of the previous section.
+UNDERSTAND NOW: sign and magnitude.
 For the lecturer: Simple for people, awkward for circuits. It survives in the mantissa of IEEE 754 floating-point numbers (Lecture 06).</a:t>
             </a:r>
             <a:endParaRPr lang="en-US" dirty="0"/>
@@ -749,6 +752,7 @@
             <a:r>
               <a:rPr lang="en-US" dirty="0"/>
               <a:t>Two's complement. Non-negative numbers are represented by themselves. A negative number x is represented by 2 to the n minus its magnitude: on four bits, minus 3 is 16 minus 3, that is 13, 1101. The range is not symmetric: from minus 2 to the n minus 1 up to 2 to the n minus 1, minus 1, so on four bits from minus 8 to plus 7. Zero has one representation only, and the leftmost bit is 1 exactly when the number is negative. For a 32-bit register the range is about minus two billion to plus two billion.
+UNDERSTAND NOW: two's complement.
 For the lecturer: Also called radix complement (complemento alla base). The asymmetry of the range (one more negative number) has a consequence: negating the most negative number overflows.</a:t>
             </a:r>
             <a:endParaRPr lang="en-US" dirty="0"/>
@@ -838,6 +842,7 @@
             <a:r>
               <a:rPr lang="en-US" dirty="0"/>
               <a:t>The same sixteen patterns read in three ways. In the left table, where the leftmost bit is 0, the three readings agree. In the right table they differ: 1000 is 8 as unsigned, minus zero in sign and magnitude, and minus 8 in two's complement; 1111 is 15, minus 7 or minus 1. The sentence at the bottom is the key to the whole lecture: the bits do not say which column is right. The program says it, through the instructions it chooses.
+UNDERSTAND NOW: two's complement.
 For the lecturer: Highlighted: 1000 is minus zero in sign and magnitude but -8 in two's complement; 1111 is -7 or -1. One's complement and excess-8 are added to this table in Lecture 06.</a:t>
             </a:r>
             <a:endParaRPr lang="en-US" dirty="0"/>
@@ -927,6 +932,7 @@
             <a:r>
               <a:rPr lang="en-US" dirty="0"/>
               <a:t>With n bits the numbers form a circle: after the last pattern comes the first. Adding 1 moves one step clockwise. The inner ring gives the unsigned value, the outer discs the value in two's complement. The wheel "breaks" in two different places. For the unsigned reading the break is at the top, between 1111 and 0000: crossing it is a carry. For two's complement it is at the bottom, between 0111 and 1000: crossing it is a signed overflow. And one step back from 0000 is 1111: this is the FFFFFFFF of the warm-up.
+UNDERSTAND NOW: two's complement.
 For the lecturer: Inner ring: unsigned value. Middle: bits. Outer discs: two's complement value. The same adder serves both readings: only the place where the wheel 'breaks' changes.</a:t>
             </a:r>
             <a:endParaRPr lang="en-US" dirty="0"/>
@@ -1016,6 +1022,7 @@
             <a:r>
               <a:rPr lang="en-US" dirty="0"/>
               <a:t>Three calculations that show the advantage of two's complement. To add 2 and minus 6, simply add the two patterns: 0010 plus 1010 is 1100, which reads minus 4. To add two negative numbers, add the patterns and discard the carry out of the leftmost position. Even the product works on the low four bits. The first row of bullets is the point: the adder does not need to know the signs. The circuit that adds natural numbers already gives the right answer for signed ones.
+UNDERSTAND NOW: two's complement.
 For the lecturer: Check of the product: 2 x 13 = 26 = 1 1010; the low four bits are 1010, which reads -6. This is why RISC-V has a single mul for signed and unsigned operands.</a:t>
             </a:r>
             <a:endParaRPr lang="en-US" dirty="0"/>
@@ -1105,6 +1112,7 @@
             <a:r>
               <a:rPr lang="en-US" dirty="0"/>
               <a:t>There are two overflows, and they are independent. For unsigned numbers, overflow is a carry out of the leftmost bit: 128 plus 130 on eight bits leaves 2 in the register. For signed numbers, overflow is a result with the wrong sign: 127 plus 127 produces no carry out, but the pattern reads minus 2. The rule: two positive operands that give a negative sum, or two negative ones that give a positive sum. Two operands of opposite sign can never overflow, because the result lies between them.
+UNDERSTAND NOW: two's complement.
 For the lecturer: Equivalent circuit rule for signed overflow: the carry into the most significant bit differs from the carry out of it.</a:t>
             </a:r>
             <a:endParaRPr lang="en-US" dirty="0"/>
@@ -1194,6 +1202,7 @@
             <a:r>
               <a:rPr lang="en-US" dirty="0"/>
               <a:t>How is a number moved to more bits without changing its value? For two's complement, copy the sign bit into all the new positions: minus 1 on four bits, 1111, becomes 1111 1111 on eight; plus 5, 0101, becomes 0000 0101. This is sign extension. The processor does it whenever a short value meets a long one: the twelve-bit constant of addi is sign-extended to thirty-two bits, and lb sign-extends the byte it loads, while lbu fills with zeros.
+UNDERSTAND NOW: sign extension.
 For the lecturer: Extending with zeros would turn 1111 (-1) into 0000 1111 (+15). Sign extension is the signed counterpart of the 'extension on the left' property seen for naturals.</a:t>
             </a:r>
             <a:endParaRPr lang="en-US" dirty="0"/>
@@ -1641,6 +1650,7 @@
             <a:r>
               <a:rPr lang="en-US" dirty="0"/>
               <a:t>Five conclusions. Each base has its use: two for circuits, sixteen for people who read bits. With n bits there are 2 to the n numbers, and the encoding law says which. Two's complement turns subtraction into addition. Overflow is the price of finite registers: detect it, or design it away as with the clamp. And in RISC-V the bits have no type: the instruction chooses. The next lecture completes the picture with the real numbers.
+Learning status, recap. UNDERSTAND NOW: two's complement; base conversions; naturals and overflow; shifts as multiplications; sign and magnitude; signed or unsigned instructions; sign extension. USE NOW: the PRG32 runtime calls, the complete program, the PRG32 tools (used, not studied, in this course). UNDERSTAND LATER: nothing. A slide without a badge is context: a story, an example, a question, an exercise.
 For the lecturer: Next lecture: one's complement, excess-k, fixed point and IEEE 754 floating point.</a:t>
             </a:r>
             <a:endParaRPr lang="en-US" dirty="0"/>
@@ -1730,6 +1740,7 @@
             <a:r>
               <a:rPr lang="en-US" dirty="0"/>
               <a:t>A positional system with base b uses b digits, from 0 to b minus 1, and the value of a number is the sum of each digit times the power of b that corresponds to its position: the formula in the caption. The table shows thirteen in four bases: 1101 in binary, 15 in octal, 13 in decimal, D in hexadecimal. It is always the same number: only its writing changes. Base 10 has no special status for a machine; it is the base of people with ten fingers.
+UNDERSTAND NOW: base conversions.
 For the lecturer: A number N is a string of digits d(n-1) ... d(1) d(0), each smaller than the base b. The value is the sum of each digit times the power of the base of its position.</a:t>
             </a:r>
             <a:endParaRPr lang="en-US" dirty="0"/>
@@ -1819,6 +1830,7 @@
             <a:r>
               <a:rPr lang="en-US" dirty="0"/>
               <a:t>Bases that are powers of two share the same bits. The slide takes 127, writes it in binary, and groups the bits from the right: in fours, each group is one hexadecimal digit, giving 7F; in threes, each group is one octal digit, giving 177. No division is needed, only a table lookup. Two details: always group from the right, the least significant end, and pad the leftmost group with zeros if it is incomplete.
+UNDERSTAND NOW: base conversions.
 For the lecturer: Group from the right (the least significant end) and pad with zeros on the left.</a:t>
             </a:r>
             <a:endParaRPr lang="en-US" dirty="0"/>
@@ -1908,6 +1920,7 @@
             <a:r>
               <a:rPr lang="en-US" dirty="0"/>
               <a:t>To convert an integer from base 10 to base r, divide by r repeatedly: each remainder is a digit, and the quotient is divided again until it becomes zero. The three tables do it for 127 with r equal to 8, 16 and 2. The yellow box holds the detail that is most often got wrong: the first remainder is the least significant digit, so the remainders must be read from the bottom up. Check: 177 in octal is 64 + 56 + 7 = 127.
+UNDERSTAND NOW: base conversions.
 For the lecturer: N = Q(n) r^(n+1) + R(n) r^n + ... + R(1) r + R(0). In C the two operations are / and %; in RISC-V (M extension) they are divu and remu.</a:t>
             </a:r>
             <a:endParaRPr lang="en-US" dirty="0"/>
@@ -1997,6 +2010,7 @@
             <a:r>
               <a:rPr lang="en-US" dirty="0"/>
               <a:t>For a number between 0 and 1 the procedure is the mirror image: multiply by r repeatedly; each time the integer part of the product is a digit, starting from the most significant, and the fractional part is multiplied again. 0.875 gives 0.111 and stops, because the fraction becomes zero. 0.8 never stops: the same fractions return, and the digits 1100 repeat for ever. A number that is finite in base ten can be periodic in base two, and with a finite number of bits it must be cut. This is the origin of the rounding errors of Lecture 06.
+UNDERSTAND NOW: base conversions.
 For the lecturer: N = R(1) r^-1 + R(2) r^-2 + ... The source slides linked two online converters (fermimn.edu.it and fauser.edu); any modern calculator in programmer mode does the same.</a:t>
             </a:r>
             <a:endParaRPr lang="en-US" dirty="0"/>
@@ -2086,6 +2100,7 @@
             <a:r>
               <a:rPr lang="en-US" dirty="0"/>
               <a:t>For natural numbers the law is the simplest possible: X is x written in binary. With n bits there are 2 to the n patterns, so the numbers go from 0 to 2 to the n minus 1: with four bits, from 0 to 15, as the strip shows. The table gives the cases you meet on RISC-V: a byte reaches 255, a halfword 65,535, a word 4,294,967,295. The last is the unsigned reading of FFFFFFFF: half of the answer to the warm-up.
+UNDERSTAND NOW: naturals and overflow.
 For the lecturer: 4,294,967,295 is the unsigned reading of 0xFFFFFFFF: the first half of the answer to the warm-up.</a:t>
             </a:r>
             <a:endParaRPr lang="en-US" dirty="0"/>
@@ -2174,7 +2189,8 @@
           <a:p>
             <a:r>
               <a:rPr lang="en-US" dirty="0"/>
-              <a:t>The definition to remember. A register has a finite number of bits, so it represents a finite subset of an infinite set of numbers. The arithmetic operations are closed on the whole set, not on the subset: the sum of two representable numbers may fall outside. When this happens there is an overflow. The example uses seven bits, which cover 0 to 127: 100 and 38 are both representable, and their sum, 138, is not. Overflow is not a fault of the machine: it is a consequence of finiteness.</a:t>
+              <a:t>The definition to remember. A register has a finite number of bits, so it represents a finite subset of an infinite set of numbers. The arithmetic operations are closed on the whole set, not on the subset: the sum of two representable numbers may fall outside. When this happens there is an overflow. The example uses seven bits, which cover 0 to 127: 100 and 38 are both representable, and their sum, 138, is not. Overflow is not a fault of the machine: it is a consequence of finiteness.
+UNDERSTAND NOW: naturals and overflow.</a:t>
             </a:r>
             <a:endParaRPr lang="en-US" dirty="0"/>
           </a:p>
@@ -2263,6 +2279,7 @@
             <a:r>
               <a:rPr lang="en-US" dirty="0"/>
               <a:t>Four calculations on four bits, done column by column as in decimal: 1 plus 1 is 0 with a carry of 1. Six plus eight fits. Fourteen plus three gives seventeen, which needs a fifth bit: an overflow. The difference borrows as in decimal. The product of two numbers of n bits may need 2n bits, which is why RISC-V has two instructions: mul for the low half of the product and mulhu for the high half. Redo the four calculations by hand, covering the results.
+UNDERSTAND NOW: naturals and overflow.
 For the lecturer: The source slide said the overflow 'can be detected through the overflow bit': true of processors with a flags register, not of RISC-V. See the last section.</a:t>
             </a:r>
             <a:endParaRPr lang="en-US" dirty="0"/>
@@ -3400,6 +3417,420 @@
       </p:pic>
       <p:sp>
         <p:nvSpPr>
+          <p:cNvPr id="15" name="Shape 12"/>
+          <p:cNvSpPr/>
+          <p:nvPr/>
+        </p:nvSpPr>
+        <p:spPr>
+          <a:xfrm>
+            <a:off x="9690303" y="91440"/>
+            <a:ext cx="1952752" cy="274320"/>
+          </a:xfrm>
+          <a:prstGeom prst="rect">
+            <a:avLst/>
+          </a:prstGeom>
+          <a:solidFill>
+            <a:srgbClr val="F3E8FF"/>
+          </a:solidFill>
+          <a:ln w="12700">
+            <a:solidFill>
+              <a:srgbClr val="7E22CE"/>
+            </a:solidFill>
+            <a:prstDash val="dash"/>
+          </a:ln>
+        </p:spPr>
+      </p:sp>
+      <p:sp>
+        <p:nvSpPr>
+          <p:cNvPr id="16" name="Shape 13"/>
+          <p:cNvSpPr/>
+          <p:nvPr/>
+        </p:nvSpPr>
+        <p:spPr>
+          <a:xfrm>
+            <a:off x="9717735" y="128016"/>
+            <a:ext cx="45720" cy="45720"/>
+          </a:xfrm>
+          <a:prstGeom prst="rect">
+            <a:avLst/>
+          </a:prstGeom>
+          <a:solidFill>
+            <a:srgbClr val="7E22CE"/>
+          </a:solidFill>
+          <a:ln w="12700">
+            <a:solidFill>
+              <a:srgbClr val="7E22CE"/>
+            </a:solidFill>
+            <a:prstDash val="solid"/>
+          </a:ln>
+        </p:spPr>
+      </p:sp>
+      <p:sp>
+        <p:nvSpPr>
+          <p:cNvPr id="17" name="Shape 14"/>
+          <p:cNvSpPr/>
+          <p:nvPr/>
+        </p:nvSpPr>
+        <p:spPr>
+          <a:xfrm>
+            <a:off x="9717735" y="205740"/>
+            <a:ext cx="45720" cy="45720"/>
+          </a:xfrm>
+          <a:prstGeom prst="rect">
+            <a:avLst/>
+          </a:prstGeom>
+          <a:solidFill>
+            <a:srgbClr val="7E22CE"/>
+          </a:solidFill>
+          <a:ln w="12700">
+            <a:solidFill>
+              <a:srgbClr val="7E22CE"/>
+            </a:solidFill>
+            <a:prstDash val="solid"/>
+          </a:ln>
+        </p:spPr>
+      </p:sp>
+      <p:sp>
+        <p:nvSpPr>
+          <p:cNvPr id="18" name="Shape 15"/>
+          <p:cNvSpPr/>
+          <p:nvPr/>
+        </p:nvSpPr>
+        <p:spPr>
+          <a:xfrm>
+            <a:off x="9717735" y="283464"/>
+            <a:ext cx="45720" cy="45720"/>
+          </a:xfrm>
+          <a:prstGeom prst="rect">
+            <a:avLst/>
+          </a:prstGeom>
+          <a:solidFill>
+            <a:srgbClr val="7E22CE"/>
+          </a:solidFill>
+          <a:ln w="12700">
+            <a:solidFill>
+              <a:srgbClr val="7E22CE"/>
+            </a:solidFill>
+            <a:prstDash val="solid"/>
+          </a:ln>
+        </p:spPr>
+      </p:sp>
+      <p:pic>
+        <p:nvPicPr>
+          <p:cNvPr id="19" name="Image 1" descr="preencoded.png">    </p:cNvPr>
+          <p:cNvPicPr>
+            <a:picLocks noChangeAspect="1"/>
+          </p:cNvPicPr>
+          <p:nvPr/>
+        </p:nvPicPr>
+        <p:blipFill>
+          <a:blip r:embed="rId2"/>
+          <a:stretch>
+            <a:fillRect/>
+          </a:stretch>
+        </p:blipFill>
+        <p:spPr>
+          <a:xfrm>
+            <a:off x="9818319" y="128016"/>
+            <a:ext cx="201168" cy="201168"/>
+          </a:xfrm>
+          <a:prstGeom prst="rect">
+            <a:avLst/>
+          </a:prstGeom>
+        </p:spPr>
+      </p:pic>
+      <p:sp>
+        <p:nvSpPr>
+          <p:cNvPr id="20" name="Text 16"/>
+          <p:cNvSpPr txBox="1"/>
+          <p:nvPr/>
+        </p:nvSpPr>
+        <p:spPr>
+          <a:xfrm>
+            <a:off x="10074351" y="91440"/>
+            <a:ext cx="1532128" cy="274320"/>
+          </a:xfrm>
+          <a:prstGeom prst="rect">
+            <a:avLst/>
+          </a:prstGeom>
+          <a:noFill/>
+          <a:ln/>
+        </p:spPr>
+        <p:txBody>
+          <a:bodyPr wrap="square" lIns="0" tIns="0" rIns="0" bIns="0" rtlCol="0" anchor="ctr"/>
+          <a:lstStyle/>
+          <a:p>
+            <a:pPr indent="0" marL="0">
+              <a:buNone/>
+            </a:pPr>
+            <a:r>
+              <a:rPr lang="en-US" sz="1100" b="1" dirty="0">
+                <a:solidFill>
+                  <a:srgbClr val="6B21A8"/>
+                </a:solidFill>
+                <a:latin typeface="Calibri" pitchFamily="34" charset="0"/>
+                <a:ea typeface="Calibri" pitchFamily="34" charset="-122"/>
+                <a:cs typeface="Calibri" pitchFamily="34" charset="-120"/>
+              </a:rPr>
+              <a:t>UNDERSTAND LATER</a:t>
+            </a:r>
+            <a:endParaRPr lang="en-US" sz="1100" dirty="0"/>
+          </a:p>
+        </p:txBody>
+      </p:sp>
+      <p:sp>
+        <p:nvSpPr>
+          <p:cNvPr id="21" name="Shape 17"/>
+          <p:cNvSpPr/>
+          <p:nvPr/>
+        </p:nvSpPr>
+        <p:spPr>
+          <a:xfrm>
+            <a:off x="8407349" y="91440"/>
+            <a:ext cx="1173226" cy="274320"/>
+          </a:xfrm>
+          <a:prstGeom prst="rect">
+            <a:avLst/>
+          </a:prstGeom>
+          <a:solidFill>
+            <a:srgbClr val="FEF3C7"/>
+          </a:solidFill>
+          <a:ln w="12700">
+            <a:solidFill>
+              <a:srgbClr val="B45309"/>
+            </a:solidFill>
+            <a:prstDash val="solid"/>
+          </a:ln>
+        </p:spPr>
+      </p:sp>
+      <p:sp>
+        <p:nvSpPr>
+          <p:cNvPr id="22" name="Shape 18"/>
+          <p:cNvSpPr/>
+          <p:nvPr/>
+        </p:nvSpPr>
+        <p:spPr>
+          <a:xfrm>
+            <a:off x="8407349" y="91440"/>
+            <a:ext cx="27432" cy="274320"/>
+          </a:xfrm>
+          <a:prstGeom prst="rect">
+            <a:avLst/>
+          </a:prstGeom>
+          <a:solidFill>
+            <a:srgbClr val="B45309"/>
+          </a:solidFill>
+          <a:ln w="12700">
+            <a:solidFill>
+              <a:srgbClr val="B45309"/>
+            </a:solidFill>
+            <a:prstDash val="solid"/>
+          </a:ln>
+        </p:spPr>
+      </p:sp>
+      <p:sp>
+        <p:nvSpPr>
+          <p:cNvPr id="23" name="Shape 19"/>
+          <p:cNvSpPr/>
+          <p:nvPr/>
+        </p:nvSpPr>
+        <p:spPr>
+          <a:xfrm>
+            <a:off x="8462213" y="91440"/>
+            <a:ext cx="27432" cy="274320"/>
+          </a:xfrm>
+          <a:prstGeom prst="rect">
+            <a:avLst/>
+          </a:prstGeom>
+          <a:solidFill>
+            <a:srgbClr val="B45309"/>
+          </a:solidFill>
+          <a:ln w="12700">
+            <a:solidFill>
+              <a:srgbClr val="B45309"/>
+            </a:solidFill>
+            <a:prstDash val="solid"/>
+          </a:ln>
+        </p:spPr>
+      </p:sp>
+      <p:pic>
+        <p:nvPicPr>
+          <p:cNvPr id="24" name="Image 2" descr="preencoded.png">    </p:cNvPr>
+          <p:cNvPicPr>
+            <a:picLocks noChangeAspect="1"/>
+          </p:cNvPicPr>
+          <p:nvPr/>
+        </p:nvPicPr>
+        <p:blipFill>
+          <a:blip r:embed="rId3"/>
+          <a:stretch>
+            <a:fillRect/>
+          </a:stretch>
+        </p:blipFill>
+        <p:spPr>
+          <a:xfrm>
+            <a:off x="8535365" y="128016"/>
+            <a:ext cx="201168" cy="201168"/>
+          </a:xfrm>
+          <a:prstGeom prst="rect">
+            <a:avLst/>
+          </a:prstGeom>
+        </p:spPr>
+      </p:pic>
+      <p:sp>
+        <p:nvSpPr>
+          <p:cNvPr id="25" name="Text 20"/>
+          <p:cNvSpPr txBox="1"/>
+          <p:nvPr/>
+        </p:nvSpPr>
+        <p:spPr>
+          <a:xfrm>
+            <a:off x="8791397" y="91440"/>
+            <a:ext cx="752602" cy="274320"/>
+          </a:xfrm>
+          <a:prstGeom prst="rect">
+            <a:avLst/>
+          </a:prstGeom>
+          <a:noFill/>
+          <a:ln/>
+        </p:spPr>
+        <p:txBody>
+          <a:bodyPr wrap="square" lIns="0" tIns="0" rIns="0" bIns="0" rtlCol="0" anchor="ctr"/>
+          <a:lstStyle/>
+          <a:p>
+            <a:pPr indent="0" marL="0">
+              <a:buNone/>
+            </a:pPr>
+            <a:r>
+              <a:rPr lang="en-US" sz="1100" b="1" dirty="0">
+                <a:solidFill>
+                  <a:srgbClr val="92400E"/>
+                </a:solidFill>
+                <a:latin typeface="Calibri" pitchFamily="34" charset="0"/>
+                <a:ea typeface="Calibri" pitchFamily="34" charset="-122"/>
+                <a:cs typeface="Calibri" pitchFamily="34" charset="-120"/>
+              </a:rPr>
+              <a:t>USE NOW</a:t>
+            </a:r>
+            <a:endParaRPr lang="en-US" sz="1100" dirty="0"/>
+          </a:p>
+        </p:txBody>
+      </p:sp>
+      <p:sp>
+        <p:nvSpPr>
+          <p:cNvPr id="26" name="Shape 21"/>
+          <p:cNvSpPr/>
+          <p:nvPr/>
+        </p:nvSpPr>
+        <p:spPr>
+          <a:xfrm>
+            <a:off x="6518097" y="91440"/>
+            <a:ext cx="1779524" cy="274320"/>
+          </a:xfrm>
+          <a:prstGeom prst="rect">
+            <a:avLst/>
+          </a:prstGeom>
+          <a:solidFill>
+            <a:srgbClr val="E0F2FE"/>
+          </a:solidFill>
+          <a:ln w="12700">
+            <a:solidFill>
+              <a:srgbClr val="0369A1"/>
+            </a:solidFill>
+            <a:prstDash val="solid"/>
+          </a:ln>
+        </p:spPr>
+      </p:sp>
+      <p:sp>
+        <p:nvSpPr>
+          <p:cNvPr id="27" name="Shape 22"/>
+          <p:cNvSpPr/>
+          <p:nvPr/>
+        </p:nvSpPr>
+        <p:spPr>
+          <a:xfrm>
+            <a:off x="6518097" y="91440"/>
+            <a:ext cx="73152" cy="274320"/>
+          </a:xfrm>
+          <a:prstGeom prst="rect">
+            <a:avLst/>
+          </a:prstGeom>
+          <a:solidFill>
+            <a:srgbClr val="0369A1"/>
+          </a:solidFill>
+          <a:ln w="12700">
+            <a:solidFill>
+              <a:srgbClr val="0369A1"/>
+            </a:solidFill>
+            <a:prstDash val="solid"/>
+          </a:ln>
+        </p:spPr>
+      </p:sp>
+      <p:pic>
+        <p:nvPicPr>
+          <p:cNvPr id="28" name="Image 3" descr="preencoded.png">    </p:cNvPr>
+          <p:cNvPicPr>
+            <a:picLocks noChangeAspect="1"/>
+          </p:cNvPicPr>
+          <p:nvPr/>
+        </p:nvPicPr>
+        <p:blipFill>
+          <a:blip r:embed="rId4"/>
+          <a:stretch>
+            <a:fillRect/>
+          </a:stretch>
+        </p:blipFill>
+        <p:spPr>
+          <a:xfrm>
+            <a:off x="6646113" y="128016"/>
+            <a:ext cx="201168" cy="201168"/>
+          </a:xfrm>
+          <a:prstGeom prst="rect">
+            <a:avLst/>
+          </a:prstGeom>
+        </p:spPr>
+      </p:pic>
+      <p:sp>
+        <p:nvSpPr>
+          <p:cNvPr id="29" name="Text 23"/>
+          <p:cNvSpPr txBox="1"/>
+          <p:nvPr/>
+        </p:nvSpPr>
+        <p:spPr>
+          <a:xfrm>
+            <a:off x="6902145" y="91440"/>
+            <a:ext cx="1358900" cy="274320"/>
+          </a:xfrm>
+          <a:prstGeom prst="rect">
+            <a:avLst/>
+          </a:prstGeom>
+          <a:noFill/>
+          <a:ln/>
+        </p:spPr>
+        <p:txBody>
+          <a:bodyPr wrap="square" lIns="0" tIns="0" rIns="0" bIns="0" rtlCol="0" anchor="ctr"/>
+          <a:lstStyle/>
+          <a:p>
+            <a:pPr indent="0" marL="0">
+              <a:buNone/>
+            </a:pPr>
+            <a:r>
+              <a:rPr lang="en-US" sz="1100" b="1" dirty="0">
+                <a:solidFill>
+                  <a:srgbClr val="075985"/>
+                </a:solidFill>
+                <a:latin typeface="Calibri" pitchFamily="34" charset="0"/>
+                <a:ea typeface="Calibri" pitchFamily="34" charset="-122"/>
+                <a:cs typeface="Calibri" pitchFamily="34" charset="-120"/>
+              </a:rPr>
+              <a:t>UNDERSTAND NOW</a:t>
+            </a:r>
+            <a:endParaRPr lang="en-US" sz="1100" dirty="0"/>
+          </a:p>
+        </p:txBody>
+      </p:sp>
+      <p:sp>
+        <p:nvSpPr>
           <p:cNvPr id="25" name="Slide Number Placeholder 0"/>
           <p:cNvSpPr>
             <a:spLocks noGrp="1"/>
@@ -3927,6 +4358,133 @@
       </p:sp>
       <p:sp>
         <p:nvSpPr>
+          <p:cNvPr id="14" name="Shape 12"/>
+          <p:cNvSpPr/>
+          <p:nvPr/>
+        </p:nvSpPr>
+        <p:spPr>
+          <a:xfrm>
+            <a:off x="8484692" y="91440"/>
+            <a:ext cx="3158363" cy="274320"/>
+          </a:xfrm>
+          <a:prstGeom prst="rect">
+            <a:avLst/>
+          </a:prstGeom>
+          <a:solidFill>
+            <a:srgbClr val="E0F2FE"/>
+          </a:solidFill>
+          <a:ln w="12700">
+            <a:solidFill>
+              <a:srgbClr val="0369A1"/>
+            </a:solidFill>
+            <a:prstDash val="solid"/>
+          </a:ln>
+        </p:spPr>
+      </p:sp>
+      <p:sp>
+        <p:nvSpPr>
+          <p:cNvPr id="15" name="Shape 13"/>
+          <p:cNvSpPr/>
+          <p:nvPr/>
+        </p:nvSpPr>
+        <p:spPr>
+          <a:xfrm>
+            <a:off x="8484692" y="91440"/>
+            <a:ext cx="73152" cy="274320"/>
+          </a:xfrm>
+          <a:prstGeom prst="rect">
+            <a:avLst/>
+          </a:prstGeom>
+          <a:solidFill>
+            <a:srgbClr val="0369A1"/>
+          </a:solidFill>
+          <a:ln w="12700">
+            <a:solidFill>
+              <a:srgbClr val="0369A1"/>
+            </a:solidFill>
+            <a:prstDash val="solid"/>
+          </a:ln>
+        </p:spPr>
+      </p:sp>
+      <p:pic>
+        <p:nvPicPr>
+          <p:cNvPr id="16" name="Image 0" descr="preencoded.png">    </p:cNvPr>
+          <p:cNvPicPr>
+            <a:picLocks noChangeAspect="1"/>
+          </p:cNvPicPr>
+          <p:nvPr/>
+        </p:nvPicPr>
+        <p:blipFill>
+          <a:blip r:embed="rId1"/>
+          <a:stretch>
+            <a:fillRect/>
+          </a:stretch>
+        </p:blipFill>
+        <p:spPr>
+          <a:xfrm>
+            <a:off x="8612708" y="128016"/>
+            <a:ext cx="201168" cy="201168"/>
+          </a:xfrm>
+          <a:prstGeom prst="rect">
+            <a:avLst/>
+          </a:prstGeom>
+        </p:spPr>
+      </p:pic>
+      <p:sp>
+        <p:nvSpPr>
+          <p:cNvPr id="17" name="Text 14"/>
+          <p:cNvSpPr txBox="1"/>
+          <p:nvPr/>
+        </p:nvSpPr>
+        <p:spPr>
+          <a:xfrm>
+            <a:off x="8868740" y="91440"/>
+            <a:ext cx="2737739" cy="274320"/>
+          </a:xfrm>
+          <a:prstGeom prst="rect">
+            <a:avLst/>
+          </a:prstGeom>
+          <a:noFill/>
+          <a:ln/>
+        </p:spPr>
+        <p:txBody>
+          <a:bodyPr wrap="square" lIns="0" tIns="0" rIns="0" bIns="0" rtlCol="0" anchor="ctr"/>
+          <a:lstStyle/>
+          <a:p>
+            <a:pPr indent="0" marL="0">
+              <a:buNone/>
+            </a:pPr>
+            <a:r>
+              <a:rPr lang="en-US" sz="1100" b="1" dirty="0">
+                <a:solidFill>
+                  <a:srgbClr val="075985"/>
+                </a:solidFill>
+                <a:latin typeface="Calibri" pitchFamily="34" charset="0"/>
+                <a:ea typeface="Calibri" pitchFamily="34" charset="-122"/>
+                <a:cs typeface="Calibri" pitchFamily="34" charset="-120"/>
+              </a:rPr>
+              <a:t>UNDERSTAND NOW</a:t>
+            </a:r>
+            <a:pPr indent="0" marL="0">
+              <a:buNone/>
+            </a:pPr>
+            <a:r>
+              <a:rPr lang="en-US" sz="1100" dirty="0">
+                <a:solidFill>
+                  <a:srgbClr val="075985"/>
+                </a:solidFill>
+                <a:latin typeface="Calibri" pitchFamily="34" charset="0"/>
+                <a:ea typeface="Calibri" pitchFamily="34" charset="-122"/>
+                <a:cs typeface="Calibri" pitchFamily="34" charset="-120"/>
+              </a:rPr>
+              <a:t> · sign and magnitude</a:t>
+            </a:r>
+            <a:endParaRPr lang="en-US" sz="1100" dirty="0"/>
+          </a:p>
+        </p:txBody>
+      </p:sp>
+      <p:sp>
+        <p:nvSpPr>
           <p:cNvPr id="25" name="Slide Number Placeholder 0"/>
           <p:cNvSpPr>
             <a:spLocks noGrp="1"/>
@@ -4476,6 +5034,133 @@
               <a:t>the range of a 32-bit RISC-V register read as a signed integer: about minus two billion to plus two billion</a:t>
             </a:r>
             <a:endParaRPr lang="en-US" sz="1900" dirty="0"/>
+          </a:p>
+        </p:txBody>
+      </p:sp>
+      <p:sp>
+        <p:nvSpPr>
+          <p:cNvPr id="16" name="Shape 14"/>
+          <p:cNvSpPr/>
+          <p:nvPr/>
+        </p:nvSpPr>
+        <p:spPr>
+          <a:xfrm>
+            <a:off x="8616010" y="91440"/>
+            <a:ext cx="3027045" cy="274320"/>
+          </a:xfrm>
+          <a:prstGeom prst="rect">
+            <a:avLst/>
+          </a:prstGeom>
+          <a:solidFill>
+            <a:srgbClr val="E0F2FE"/>
+          </a:solidFill>
+          <a:ln w="12700">
+            <a:solidFill>
+              <a:srgbClr val="0369A1"/>
+            </a:solidFill>
+            <a:prstDash val="solid"/>
+          </a:ln>
+        </p:spPr>
+      </p:sp>
+      <p:sp>
+        <p:nvSpPr>
+          <p:cNvPr id="17" name="Shape 15"/>
+          <p:cNvSpPr/>
+          <p:nvPr/>
+        </p:nvSpPr>
+        <p:spPr>
+          <a:xfrm>
+            <a:off x="8616010" y="91440"/>
+            <a:ext cx="73152" cy="274320"/>
+          </a:xfrm>
+          <a:prstGeom prst="rect">
+            <a:avLst/>
+          </a:prstGeom>
+          <a:solidFill>
+            <a:srgbClr val="0369A1"/>
+          </a:solidFill>
+          <a:ln w="12700">
+            <a:solidFill>
+              <a:srgbClr val="0369A1"/>
+            </a:solidFill>
+            <a:prstDash val="solid"/>
+          </a:ln>
+        </p:spPr>
+      </p:sp>
+      <p:pic>
+        <p:nvPicPr>
+          <p:cNvPr id="18" name="Image 0" descr="preencoded.png">    </p:cNvPr>
+          <p:cNvPicPr>
+            <a:picLocks noChangeAspect="1"/>
+          </p:cNvPicPr>
+          <p:nvPr/>
+        </p:nvPicPr>
+        <p:blipFill>
+          <a:blip r:embed="rId1"/>
+          <a:stretch>
+            <a:fillRect/>
+          </a:stretch>
+        </p:blipFill>
+        <p:spPr>
+          <a:xfrm>
+            <a:off x="8744026" y="128016"/>
+            <a:ext cx="201168" cy="201168"/>
+          </a:xfrm>
+          <a:prstGeom prst="rect">
+            <a:avLst/>
+          </a:prstGeom>
+        </p:spPr>
+      </p:pic>
+      <p:sp>
+        <p:nvSpPr>
+          <p:cNvPr id="19" name="Text 16"/>
+          <p:cNvSpPr txBox="1"/>
+          <p:nvPr/>
+        </p:nvSpPr>
+        <p:spPr>
+          <a:xfrm>
+            <a:off x="9000058" y="91440"/>
+            <a:ext cx="2606421" cy="274320"/>
+          </a:xfrm>
+          <a:prstGeom prst="rect">
+            <a:avLst/>
+          </a:prstGeom>
+          <a:noFill/>
+          <a:ln/>
+        </p:spPr>
+        <p:txBody>
+          <a:bodyPr wrap="square" lIns="0" tIns="0" rIns="0" bIns="0" rtlCol="0" anchor="ctr"/>
+          <a:lstStyle/>
+          <a:p>
+            <a:pPr indent="0" marL="0">
+              <a:buNone/>
+            </a:pPr>
+            <a:r>
+              <a:rPr lang="en-US" sz="1100" b="1" dirty="0">
+                <a:solidFill>
+                  <a:srgbClr val="075985"/>
+                </a:solidFill>
+                <a:latin typeface="Calibri" pitchFamily="34" charset="0"/>
+                <a:ea typeface="Calibri" pitchFamily="34" charset="-122"/>
+                <a:cs typeface="Calibri" pitchFamily="34" charset="-120"/>
+              </a:rPr>
+              <a:t>UNDERSTAND NOW</a:t>
+            </a:r>
+            <a:pPr indent="0" marL="0">
+              <a:buNone/>
+            </a:pPr>
+            <a:r>
+              <a:rPr lang="en-US" sz="1100" dirty="0">
+                <a:solidFill>
+                  <a:srgbClr val="075985"/>
+                </a:solidFill>
+                <a:latin typeface="Calibri" pitchFamily="34" charset="0"/>
+                <a:ea typeface="Calibri" pitchFamily="34" charset="-122"/>
+                <a:cs typeface="Calibri" pitchFamily="34" charset="-120"/>
+              </a:rPr>
+              <a:t> · two's complement</a:t>
+            </a:r>
+            <a:endParaRPr lang="en-US" sz="1100" dirty="0"/>
           </a:p>
         </p:txBody>
       </p:sp>
@@ -9735,6 +10420,133 @@
       </p:sp>
       <p:sp>
         <p:nvSpPr>
+          <p:cNvPr id="9" name="Shape 5"/>
+          <p:cNvSpPr/>
+          <p:nvPr/>
+        </p:nvSpPr>
+        <p:spPr>
+          <a:xfrm>
+            <a:off x="8616010" y="91440"/>
+            <a:ext cx="3027045" cy="274320"/>
+          </a:xfrm>
+          <a:prstGeom prst="rect">
+            <a:avLst/>
+          </a:prstGeom>
+          <a:solidFill>
+            <a:srgbClr val="E0F2FE"/>
+          </a:solidFill>
+          <a:ln w="12700">
+            <a:solidFill>
+              <a:srgbClr val="0369A1"/>
+            </a:solidFill>
+            <a:prstDash val="solid"/>
+          </a:ln>
+        </p:spPr>
+      </p:sp>
+      <p:sp>
+        <p:nvSpPr>
+          <p:cNvPr id="10" name="Shape 6"/>
+          <p:cNvSpPr/>
+          <p:nvPr/>
+        </p:nvSpPr>
+        <p:spPr>
+          <a:xfrm>
+            <a:off x="8616010" y="91440"/>
+            <a:ext cx="73152" cy="274320"/>
+          </a:xfrm>
+          <a:prstGeom prst="rect">
+            <a:avLst/>
+          </a:prstGeom>
+          <a:solidFill>
+            <a:srgbClr val="0369A1"/>
+          </a:solidFill>
+          <a:ln w="12700">
+            <a:solidFill>
+              <a:srgbClr val="0369A1"/>
+            </a:solidFill>
+            <a:prstDash val="solid"/>
+          </a:ln>
+        </p:spPr>
+      </p:sp>
+      <p:pic>
+        <p:nvPicPr>
+          <p:cNvPr id="11" name="Image 0" descr="preencoded.png">    </p:cNvPr>
+          <p:cNvPicPr>
+            <a:picLocks noChangeAspect="1"/>
+          </p:cNvPicPr>
+          <p:nvPr/>
+        </p:nvPicPr>
+        <p:blipFill>
+          <a:blip r:embed="rId1"/>
+          <a:stretch>
+            <a:fillRect/>
+          </a:stretch>
+        </p:blipFill>
+        <p:spPr>
+          <a:xfrm>
+            <a:off x="8744026" y="128016"/>
+            <a:ext cx="201168" cy="201168"/>
+          </a:xfrm>
+          <a:prstGeom prst="rect">
+            <a:avLst/>
+          </a:prstGeom>
+        </p:spPr>
+      </p:pic>
+      <p:sp>
+        <p:nvSpPr>
+          <p:cNvPr id="12" name="Text 7"/>
+          <p:cNvSpPr txBox="1"/>
+          <p:nvPr/>
+        </p:nvSpPr>
+        <p:spPr>
+          <a:xfrm>
+            <a:off x="9000058" y="91440"/>
+            <a:ext cx="2606421" cy="274320"/>
+          </a:xfrm>
+          <a:prstGeom prst="rect">
+            <a:avLst/>
+          </a:prstGeom>
+          <a:noFill/>
+          <a:ln/>
+        </p:spPr>
+        <p:txBody>
+          <a:bodyPr wrap="square" lIns="0" tIns="0" rIns="0" bIns="0" rtlCol="0" anchor="ctr"/>
+          <a:lstStyle/>
+          <a:p>
+            <a:pPr indent="0" marL="0">
+              <a:buNone/>
+            </a:pPr>
+            <a:r>
+              <a:rPr lang="en-US" sz="1100" b="1" dirty="0">
+                <a:solidFill>
+                  <a:srgbClr val="075985"/>
+                </a:solidFill>
+                <a:latin typeface="Calibri" pitchFamily="34" charset="0"/>
+                <a:ea typeface="Calibri" pitchFamily="34" charset="-122"/>
+                <a:cs typeface="Calibri" pitchFamily="34" charset="-120"/>
+              </a:rPr>
+              <a:t>UNDERSTAND NOW</a:t>
+            </a:r>
+            <a:pPr indent="0" marL="0">
+              <a:buNone/>
+            </a:pPr>
+            <a:r>
+              <a:rPr lang="en-US" sz="1100" dirty="0">
+                <a:solidFill>
+                  <a:srgbClr val="075985"/>
+                </a:solidFill>
+                <a:latin typeface="Calibri" pitchFamily="34" charset="0"/>
+                <a:ea typeface="Calibri" pitchFamily="34" charset="-122"/>
+                <a:cs typeface="Calibri" pitchFamily="34" charset="-120"/>
+              </a:rPr>
+              <a:t> · two's complement</a:t>
+            </a:r>
+            <a:endParaRPr lang="en-US" sz="1100" dirty="0"/>
+          </a:p>
+        </p:txBody>
+      </p:sp>
+      <p:sp>
+        <p:nvSpPr>
           <p:cNvPr id="25" name="Slide Number Placeholder 0"/>
           <p:cNvSpPr>
             <a:spLocks noGrp="1"/>
@@ -9847,9 +10659,59 @@
           </a:p>
         </p:txBody>
       </p:sp>
+      <p:sp>
+        <p:nvSpPr>
+          <p:cNvPr id="3" name="Shape 1"/>
+          <p:cNvSpPr/>
+          <p:nvPr/>
+        </p:nvSpPr>
+        <p:spPr>
+          <a:xfrm>
+            <a:off x="8616010" y="91440"/>
+            <a:ext cx="3027045" cy="274320"/>
+          </a:xfrm>
+          <a:prstGeom prst="rect">
+            <a:avLst/>
+          </a:prstGeom>
+          <a:solidFill>
+            <a:srgbClr val="E0F2FE"/>
+          </a:solidFill>
+          <a:ln w="12700">
+            <a:solidFill>
+              <a:srgbClr val="0369A1"/>
+            </a:solidFill>
+            <a:prstDash val="solid"/>
+          </a:ln>
+        </p:spPr>
+      </p:sp>
+      <p:sp>
+        <p:nvSpPr>
+          <p:cNvPr id="4" name="Shape 2"/>
+          <p:cNvSpPr/>
+          <p:nvPr/>
+        </p:nvSpPr>
+        <p:spPr>
+          <a:xfrm>
+            <a:off x="8616010" y="91440"/>
+            <a:ext cx="73152" cy="274320"/>
+          </a:xfrm>
+          <a:prstGeom prst="rect">
+            <a:avLst/>
+          </a:prstGeom>
+          <a:solidFill>
+            <a:srgbClr val="0369A1"/>
+          </a:solidFill>
+          <a:ln w="12700">
+            <a:solidFill>
+              <a:srgbClr val="0369A1"/>
+            </a:solidFill>
+            <a:prstDash val="solid"/>
+          </a:ln>
+        </p:spPr>
+      </p:sp>
       <p:pic>
         <p:nvPicPr>
-          <p:cNvPr id="4" name="Image 0" descr="preencoded.png">    </p:cNvPr>
+          <p:cNvPr id="5" name="Image 0" descr="preencoded.png">    </p:cNvPr>
           <p:cNvPicPr>
             <a:picLocks noChangeAspect="1"/>
           </p:cNvPicPr>
@@ -9863,6 +10725,83 @@
         </p:blipFill>
         <p:spPr>
           <a:xfrm>
+            <a:off x="8744026" y="128016"/>
+            <a:ext cx="201168" cy="201168"/>
+          </a:xfrm>
+          <a:prstGeom prst="rect">
+            <a:avLst/>
+          </a:prstGeom>
+        </p:spPr>
+      </p:pic>
+      <p:sp>
+        <p:nvSpPr>
+          <p:cNvPr id="6" name="Text 3"/>
+          <p:cNvSpPr txBox="1"/>
+          <p:nvPr/>
+        </p:nvSpPr>
+        <p:spPr>
+          <a:xfrm>
+            <a:off x="9000058" y="91440"/>
+            <a:ext cx="2606421" cy="274320"/>
+          </a:xfrm>
+          <a:prstGeom prst="rect">
+            <a:avLst/>
+          </a:prstGeom>
+          <a:noFill/>
+          <a:ln/>
+        </p:spPr>
+        <p:txBody>
+          <a:bodyPr wrap="square" lIns="0" tIns="0" rIns="0" bIns="0" rtlCol="0" anchor="ctr"/>
+          <a:lstStyle/>
+          <a:p>
+            <a:pPr indent="0" marL="0">
+              <a:buNone/>
+            </a:pPr>
+            <a:r>
+              <a:rPr lang="en-US" sz="1100" b="1" dirty="0">
+                <a:solidFill>
+                  <a:srgbClr val="075985"/>
+                </a:solidFill>
+                <a:latin typeface="Calibri" pitchFamily="34" charset="0"/>
+                <a:ea typeface="Calibri" pitchFamily="34" charset="-122"/>
+                <a:cs typeface="Calibri" pitchFamily="34" charset="-120"/>
+              </a:rPr>
+              <a:t>UNDERSTAND NOW</a:t>
+            </a:r>
+            <a:pPr indent="0" marL="0">
+              <a:buNone/>
+            </a:pPr>
+            <a:r>
+              <a:rPr lang="en-US" sz="1100" dirty="0">
+                <a:solidFill>
+                  <a:srgbClr val="075985"/>
+                </a:solidFill>
+                <a:latin typeface="Calibri" pitchFamily="34" charset="0"/>
+                <a:ea typeface="Calibri" pitchFamily="34" charset="-122"/>
+                <a:cs typeface="Calibri" pitchFamily="34" charset="-120"/>
+              </a:rPr>
+              <a:t> · two's complement</a:t>
+            </a:r>
+            <a:endParaRPr lang="en-US" sz="1100" dirty="0"/>
+          </a:p>
+        </p:txBody>
+      </p:sp>
+      <p:pic>
+        <p:nvPicPr>
+          <p:cNvPr id="8" name="Image 1" descr="preencoded.png">    </p:cNvPr>
+          <p:cNvPicPr>
+            <a:picLocks noChangeAspect="1"/>
+          </p:cNvPicPr>
+          <p:nvPr/>
+        </p:nvPicPr>
+        <p:blipFill>
+          <a:blip r:embed="rId2"/>
+          <a:stretch>
+            <a:fillRect/>
+          </a:stretch>
+        </p:blipFill>
+        <p:spPr>
+          <a:xfrm>
             <a:off x="502920" y="1234440"/>
             <a:ext cx="5074920" cy="5074920"/>
           </a:xfrm>
@@ -9873,7 +10812,7 @@
       </p:pic>
       <p:sp>
         <p:nvSpPr>
-          <p:cNvPr id="5" name="Shape 1"/>
+          <p:cNvPr id="9" name="Shape 4"/>
           <p:cNvSpPr/>
           <p:nvPr/>
         </p:nvSpPr>
@@ -9898,7 +10837,7 @@
       </p:sp>
       <p:sp>
         <p:nvSpPr>
-          <p:cNvPr id="6" name="Text 2"/>
+          <p:cNvPr id="10" name="Text 5"/>
           <p:cNvSpPr txBox="1"/>
           <p:nvPr/>
         </p:nvSpPr>
@@ -9940,7 +10879,7 @@
       </p:sp>
       <p:sp>
         <p:nvSpPr>
-          <p:cNvPr id="7" name="Shape 3"/>
+          <p:cNvPr id="11" name="Shape 6"/>
           <p:cNvSpPr/>
           <p:nvPr/>
         </p:nvSpPr>
@@ -9965,7 +10904,7 @@
       </p:sp>
       <p:sp>
         <p:nvSpPr>
-          <p:cNvPr id="8" name="Text 4"/>
+          <p:cNvPr id="12" name="Text 7"/>
           <p:cNvSpPr txBox="1"/>
           <p:nvPr/>
         </p:nvSpPr>
@@ -10007,7 +10946,7 @@
       </p:sp>
       <p:sp>
         <p:nvSpPr>
-          <p:cNvPr id="9" name="Shape 5"/>
+          <p:cNvPr id="13" name="Shape 8"/>
           <p:cNvSpPr/>
           <p:nvPr/>
         </p:nvSpPr>
@@ -10032,7 +10971,7 @@
       </p:sp>
       <p:sp>
         <p:nvSpPr>
-          <p:cNvPr id="10" name="Text 6"/>
+          <p:cNvPr id="14" name="Text 9"/>
           <p:cNvSpPr txBox="1"/>
           <p:nvPr/>
         </p:nvSpPr>
@@ -10094,7 +11033,7 @@
       </p:sp>
       <p:sp>
         <p:nvSpPr>
-          <p:cNvPr id="11" name="Shape 7"/>
+          <p:cNvPr id="15" name="Shape 10"/>
           <p:cNvSpPr/>
           <p:nvPr/>
         </p:nvSpPr>
@@ -10119,7 +11058,7 @@
       </p:sp>
       <p:sp>
         <p:nvSpPr>
-          <p:cNvPr id="12" name="Text 8"/>
+          <p:cNvPr id="16" name="Text 11"/>
           <p:cNvSpPr txBox="1"/>
           <p:nvPr/>
         </p:nvSpPr>
@@ -10181,7 +11120,7 @@
       </p:sp>
       <p:sp>
         <p:nvSpPr>
-          <p:cNvPr id="13" name="Shape 9"/>
+          <p:cNvPr id="17" name="Shape 12"/>
           <p:cNvSpPr/>
           <p:nvPr/>
         </p:nvSpPr>
@@ -10206,7 +11145,7 @@
       </p:sp>
       <p:sp>
         <p:nvSpPr>
-          <p:cNvPr id="14" name="Text 10"/>
+          <p:cNvPr id="18" name="Text 13"/>
           <p:cNvSpPr txBox="1"/>
           <p:nvPr/>
         </p:nvSpPr>
@@ -11316,6 +12255,133 @@
       </p:sp>
       <p:sp>
         <p:nvSpPr>
+          <p:cNvPr id="24" name="Shape 22"/>
+          <p:cNvSpPr/>
+          <p:nvPr/>
+        </p:nvSpPr>
+        <p:spPr>
+          <a:xfrm>
+            <a:off x="8616010" y="91440"/>
+            <a:ext cx="3027045" cy="274320"/>
+          </a:xfrm>
+          <a:prstGeom prst="rect">
+            <a:avLst/>
+          </a:prstGeom>
+          <a:solidFill>
+            <a:srgbClr val="E0F2FE"/>
+          </a:solidFill>
+          <a:ln w="12700">
+            <a:solidFill>
+              <a:srgbClr val="0369A1"/>
+            </a:solidFill>
+            <a:prstDash val="solid"/>
+          </a:ln>
+        </p:spPr>
+      </p:sp>
+      <p:sp>
+        <p:nvSpPr>
+          <p:cNvPr id="25" name="Shape 23"/>
+          <p:cNvSpPr/>
+          <p:nvPr/>
+        </p:nvSpPr>
+        <p:spPr>
+          <a:xfrm>
+            <a:off x="8616010" y="91440"/>
+            <a:ext cx="73152" cy="274320"/>
+          </a:xfrm>
+          <a:prstGeom prst="rect">
+            <a:avLst/>
+          </a:prstGeom>
+          <a:solidFill>
+            <a:srgbClr val="0369A1"/>
+          </a:solidFill>
+          <a:ln w="12700">
+            <a:solidFill>
+              <a:srgbClr val="0369A1"/>
+            </a:solidFill>
+            <a:prstDash val="solid"/>
+          </a:ln>
+        </p:spPr>
+      </p:sp>
+      <p:pic>
+        <p:nvPicPr>
+          <p:cNvPr id="26" name="Image 0" descr="preencoded.png">    </p:cNvPr>
+          <p:cNvPicPr>
+            <a:picLocks noChangeAspect="1"/>
+          </p:cNvPicPr>
+          <p:nvPr/>
+        </p:nvPicPr>
+        <p:blipFill>
+          <a:blip r:embed="rId1"/>
+          <a:stretch>
+            <a:fillRect/>
+          </a:stretch>
+        </p:blipFill>
+        <p:spPr>
+          <a:xfrm>
+            <a:off x="8744026" y="128016"/>
+            <a:ext cx="201168" cy="201168"/>
+          </a:xfrm>
+          <a:prstGeom prst="rect">
+            <a:avLst/>
+          </a:prstGeom>
+        </p:spPr>
+      </p:pic>
+      <p:sp>
+        <p:nvSpPr>
+          <p:cNvPr id="27" name="Text 24"/>
+          <p:cNvSpPr txBox="1"/>
+          <p:nvPr/>
+        </p:nvSpPr>
+        <p:spPr>
+          <a:xfrm>
+            <a:off x="9000058" y="91440"/>
+            <a:ext cx="2606421" cy="274320"/>
+          </a:xfrm>
+          <a:prstGeom prst="rect">
+            <a:avLst/>
+          </a:prstGeom>
+          <a:noFill/>
+          <a:ln/>
+        </p:spPr>
+        <p:txBody>
+          <a:bodyPr wrap="square" lIns="0" tIns="0" rIns="0" bIns="0" rtlCol="0" anchor="ctr"/>
+          <a:lstStyle/>
+          <a:p>
+            <a:pPr indent="0" marL="0">
+              <a:buNone/>
+            </a:pPr>
+            <a:r>
+              <a:rPr lang="en-US" sz="1100" b="1" dirty="0">
+                <a:solidFill>
+                  <a:srgbClr val="075985"/>
+                </a:solidFill>
+                <a:latin typeface="Calibri" pitchFamily="34" charset="0"/>
+                <a:ea typeface="Calibri" pitchFamily="34" charset="-122"/>
+                <a:cs typeface="Calibri" pitchFamily="34" charset="-120"/>
+              </a:rPr>
+              <a:t>UNDERSTAND NOW</a:t>
+            </a:r>
+            <a:pPr indent="0" marL="0">
+              <a:buNone/>
+            </a:pPr>
+            <a:r>
+              <a:rPr lang="en-US" sz="1100" dirty="0">
+                <a:solidFill>
+                  <a:srgbClr val="075985"/>
+                </a:solidFill>
+                <a:latin typeface="Calibri" pitchFamily="34" charset="0"/>
+                <a:ea typeface="Calibri" pitchFamily="34" charset="-122"/>
+                <a:cs typeface="Calibri" pitchFamily="34" charset="-120"/>
+              </a:rPr>
+              <a:t> · two's complement</a:t>
+            </a:r>
+            <a:endParaRPr lang="en-US" sz="1100" dirty="0"/>
+          </a:p>
+        </p:txBody>
+      </p:sp>
+      <p:sp>
+        <p:nvSpPr>
           <p:cNvPr id="25" name="Slide Number Placeholder 0"/>
           <p:cNvSpPr>
             <a:spLocks noGrp="1"/>
@@ -12240,6 +13306,133 @@
       </p:sp>
       <p:sp>
         <p:nvSpPr>
+          <p:cNvPr id="21" name="Shape 19"/>
+          <p:cNvSpPr/>
+          <p:nvPr/>
+        </p:nvSpPr>
+        <p:spPr>
+          <a:xfrm>
+            <a:off x="8616010" y="91440"/>
+            <a:ext cx="3027045" cy="274320"/>
+          </a:xfrm>
+          <a:prstGeom prst="rect">
+            <a:avLst/>
+          </a:prstGeom>
+          <a:solidFill>
+            <a:srgbClr val="E0F2FE"/>
+          </a:solidFill>
+          <a:ln w="12700">
+            <a:solidFill>
+              <a:srgbClr val="0369A1"/>
+            </a:solidFill>
+            <a:prstDash val="solid"/>
+          </a:ln>
+        </p:spPr>
+      </p:sp>
+      <p:sp>
+        <p:nvSpPr>
+          <p:cNvPr id="22" name="Shape 20"/>
+          <p:cNvSpPr/>
+          <p:nvPr/>
+        </p:nvSpPr>
+        <p:spPr>
+          <a:xfrm>
+            <a:off x="8616010" y="91440"/>
+            <a:ext cx="73152" cy="274320"/>
+          </a:xfrm>
+          <a:prstGeom prst="rect">
+            <a:avLst/>
+          </a:prstGeom>
+          <a:solidFill>
+            <a:srgbClr val="0369A1"/>
+          </a:solidFill>
+          <a:ln w="12700">
+            <a:solidFill>
+              <a:srgbClr val="0369A1"/>
+            </a:solidFill>
+            <a:prstDash val="solid"/>
+          </a:ln>
+        </p:spPr>
+      </p:sp>
+      <p:pic>
+        <p:nvPicPr>
+          <p:cNvPr id="23" name="Image 0" descr="preencoded.png">    </p:cNvPr>
+          <p:cNvPicPr>
+            <a:picLocks noChangeAspect="1"/>
+          </p:cNvPicPr>
+          <p:nvPr/>
+        </p:nvPicPr>
+        <p:blipFill>
+          <a:blip r:embed="rId1"/>
+          <a:stretch>
+            <a:fillRect/>
+          </a:stretch>
+        </p:blipFill>
+        <p:spPr>
+          <a:xfrm>
+            <a:off x="8744026" y="128016"/>
+            <a:ext cx="201168" cy="201168"/>
+          </a:xfrm>
+          <a:prstGeom prst="rect">
+            <a:avLst/>
+          </a:prstGeom>
+        </p:spPr>
+      </p:pic>
+      <p:sp>
+        <p:nvSpPr>
+          <p:cNvPr id="24" name="Text 21"/>
+          <p:cNvSpPr txBox="1"/>
+          <p:nvPr/>
+        </p:nvSpPr>
+        <p:spPr>
+          <a:xfrm>
+            <a:off x="9000058" y="91440"/>
+            <a:ext cx="2606421" cy="274320"/>
+          </a:xfrm>
+          <a:prstGeom prst="rect">
+            <a:avLst/>
+          </a:prstGeom>
+          <a:noFill/>
+          <a:ln/>
+        </p:spPr>
+        <p:txBody>
+          <a:bodyPr wrap="square" lIns="0" tIns="0" rIns="0" bIns="0" rtlCol="0" anchor="ctr"/>
+          <a:lstStyle/>
+          <a:p>
+            <a:pPr indent="0" marL="0">
+              <a:buNone/>
+            </a:pPr>
+            <a:r>
+              <a:rPr lang="en-US" sz="1100" b="1" dirty="0">
+                <a:solidFill>
+                  <a:srgbClr val="075985"/>
+                </a:solidFill>
+                <a:latin typeface="Calibri" pitchFamily="34" charset="0"/>
+                <a:ea typeface="Calibri" pitchFamily="34" charset="-122"/>
+                <a:cs typeface="Calibri" pitchFamily="34" charset="-120"/>
+              </a:rPr>
+              <a:t>UNDERSTAND NOW</a:t>
+            </a:r>
+            <a:pPr indent="0" marL="0">
+              <a:buNone/>
+            </a:pPr>
+            <a:r>
+              <a:rPr lang="en-US" sz="1100" dirty="0">
+                <a:solidFill>
+                  <a:srgbClr val="075985"/>
+                </a:solidFill>
+                <a:latin typeface="Calibri" pitchFamily="34" charset="0"/>
+                <a:ea typeface="Calibri" pitchFamily="34" charset="-122"/>
+                <a:cs typeface="Calibri" pitchFamily="34" charset="-120"/>
+              </a:rPr>
+              <a:t> · two's complement</a:t>
+            </a:r>
+            <a:endParaRPr lang="en-US" sz="1100" dirty="0"/>
+          </a:p>
+        </p:txBody>
+      </p:sp>
+      <p:sp>
+        <p:nvSpPr>
           <p:cNvPr id="25" name="Slide Number Placeholder 0"/>
           <p:cNvSpPr>
             <a:spLocks noGrp="1"/>
@@ -13132,6 +14325,133 @@
               <a:t>lb sign-extends the byte it loads; lbu fills with zeros: choose according to what the byte means</a:t>
             </a:r>
             <a:endParaRPr lang="en-US" sz="1700" dirty="0"/>
+          </a:p>
+        </p:txBody>
+      </p:sp>
+      <p:sp>
+        <p:nvSpPr>
+          <p:cNvPr id="23" name="Shape 21"/>
+          <p:cNvSpPr/>
+          <p:nvPr/>
+        </p:nvSpPr>
+        <p:spPr>
+          <a:xfrm>
+            <a:off x="8747328" y="91440"/>
+            <a:ext cx="2895727" cy="274320"/>
+          </a:xfrm>
+          <a:prstGeom prst="rect">
+            <a:avLst/>
+          </a:prstGeom>
+          <a:solidFill>
+            <a:srgbClr val="E0F2FE"/>
+          </a:solidFill>
+          <a:ln w="12700">
+            <a:solidFill>
+              <a:srgbClr val="0369A1"/>
+            </a:solidFill>
+            <a:prstDash val="solid"/>
+          </a:ln>
+        </p:spPr>
+      </p:sp>
+      <p:sp>
+        <p:nvSpPr>
+          <p:cNvPr id="24" name="Shape 22"/>
+          <p:cNvSpPr/>
+          <p:nvPr/>
+        </p:nvSpPr>
+        <p:spPr>
+          <a:xfrm>
+            <a:off x="8747328" y="91440"/>
+            <a:ext cx="73152" cy="274320"/>
+          </a:xfrm>
+          <a:prstGeom prst="rect">
+            <a:avLst/>
+          </a:prstGeom>
+          <a:solidFill>
+            <a:srgbClr val="0369A1"/>
+          </a:solidFill>
+          <a:ln w="12700">
+            <a:solidFill>
+              <a:srgbClr val="0369A1"/>
+            </a:solidFill>
+            <a:prstDash val="solid"/>
+          </a:ln>
+        </p:spPr>
+      </p:sp>
+      <p:pic>
+        <p:nvPicPr>
+          <p:cNvPr id="25" name="Image 0" descr="preencoded.png">    </p:cNvPr>
+          <p:cNvPicPr>
+            <a:picLocks noChangeAspect="1"/>
+          </p:cNvPicPr>
+          <p:nvPr/>
+        </p:nvPicPr>
+        <p:blipFill>
+          <a:blip r:embed="rId1"/>
+          <a:stretch>
+            <a:fillRect/>
+          </a:stretch>
+        </p:blipFill>
+        <p:spPr>
+          <a:xfrm>
+            <a:off x="8875344" y="128016"/>
+            <a:ext cx="201168" cy="201168"/>
+          </a:xfrm>
+          <a:prstGeom prst="rect">
+            <a:avLst/>
+          </a:prstGeom>
+        </p:spPr>
+      </p:pic>
+      <p:sp>
+        <p:nvSpPr>
+          <p:cNvPr id="26" name="Text 23"/>
+          <p:cNvSpPr txBox="1"/>
+          <p:nvPr/>
+        </p:nvSpPr>
+        <p:spPr>
+          <a:xfrm>
+            <a:off x="9131376" y="91440"/>
+            <a:ext cx="2475103" cy="274320"/>
+          </a:xfrm>
+          <a:prstGeom prst="rect">
+            <a:avLst/>
+          </a:prstGeom>
+          <a:noFill/>
+          <a:ln/>
+        </p:spPr>
+        <p:txBody>
+          <a:bodyPr wrap="square" lIns="0" tIns="0" rIns="0" bIns="0" rtlCol="0" anchor="ctr"/>
+          <a:lstStyle/>
+          <a:p>
+            <a:pPr indent="0" marL="0">
+              <a:buNone/>
+            </a:pPr>
+            <a:r>
+              <a:rPr lang="en-US" sz="1100" b="1" dirty="0">
+                <a:solidFill>
+                  <a:srgbClr val="075985"/>
+                </a:solidFill>
+                <a:latin typeface="Calibri" pitchFamily="34" charset="0"/>
+                <a:ea typeface="Calibri" pitchFamily="34" charset="-122"/>
+                <a:cs typeface="Calibri" pitchFamily="34" charset="-120"/>
+              </a:rPr>
+              <a:t>UNDERSTAND NOW</a:t>
+            </a:r>
+            <a:pPr indent="0" marL="0">
+              <a:buNone/>
+            </a:pPr>
+            <a:r>
+              <a:rPr lang="en-US" sz="1100" dirty="0">
+                <a:solidFill>
+                  <a:srgbClr val="075985"/>
+                </a:solidFill>
+                <a:latin typeface="Calibri" pitchFamily="34" charset="0"/>
+                <a:ea typeface="Calibri" pitchFamily="34" charset="-122"/>
+                <a:cs typeface="Calibri" pitchFamily="34" charset="-120"/>
+              </a:rPr>
+              <a:t> · sign extension</a:t>
+            </a:r>
+            <a:endParaRPr lang="en-US" sz="1100" dirty="0"/>
           </a:p>
         </p:txBody>
       </p:sp>
@@ -20360,6 +21680,133 @@
       </p:sp>
       <p:sp>
         <p:nvSpPr>
+          <p:cNvPr id="5" name="Shape 2"/>
+          <p:cNvSpPr/>
+          <p:nvPr/>
+        </p:nvSpPr>
+        <p:spPr>
+          <a:xfrm>
+            <a:off x="8616010" y="91440"/>
+            <a:ext cx="3027045" cy="274320"/>
+          </a:xfrm>
+          <a:prstGeom prst="rect">
+            <a:avLst/>
+          </a:prstGeom>
+          <a:solidFill>
+            <a:srgbClr val="E0F2FE"/>
+          </a:solidFill>
+          <a:ln w="12700">
+            <a:solidFill>
+              <a:srgbClr val="0369A1"/>
+            </a:solidFill>
+            <a:prstDash val="solid"/>
+          </a:ln>
+        </p:spPr>
+      </p:sp>
+      <p:sp>
+        <p:nvSpPr>
+          <p:cNvPr id="6" name="Shape 3"/>
+          <p:cNvSpPr/>
+          <p:nvPr/>
+        </p:nvSpPr>
+        <p:spPr>
+          <a:xfrm>
+            <a:off x="8616010" y="91440"/>
+            <a:ext cx="73152" cy="274320"/>
+          </a:xfrm>
+          <a:prstGeom prst="rect">
+            <a:avLst/>
+          </a:prstGeom>
+          <a:solidFill>
+            <a:srgbClr val="0369A1"/>
+          </a:solidFill>
+          <a:ln w="12700">
+            <a:solidFill>
+              <a:srgbClr val="0369A1"/>
+            </a:solidFill>
+            <a:prstDash val="solid"/>
+          </a:ln>
+        </p:spPr>
+      </p:sp>
+      <p:pic>
+        <p:nvPicPr>
+          <p:cNvPr id="7" name="Image 0" descr="preencoded.png">    </p:cNvPr>
+          <p:cNvPicPr>
+            <a:picLocks noChangeAspect="1"/>
+          </p:cNvPicPr>
+          <p:nvPr/>
+        </p:nvPicPr>
+        <p:blipFill>
+          <a:blip r:embed="rId1"/>
+          <a:stretch>
+            <a:fillRect/>
+          </a:stretch>
+        </p:blipFill>
+        <p:spPr>
+          <a:xfrm>
+            <a:off x="8744026" y="128016"/>
+            <a:ext cx="201168" cy="201168"/>
+          </a:xfrm>
+          <a:prstGeom prst="rect">
+            <a:avLst/>
+          </a:prstGeom>
+        </p:spPr>
+      </p:pic>
+      <p:sp>
+        <p:nvSpPr>
+          <p:cNvPr id="8" name="Text 4"/>
+          <p:cNvSpPr txBox="1"/>
+          <p:nvPr/>
+        </p:nvSpPr>
+        <p:spPr>
+          <a:xfrm>
+            <a:off x="9000058" y="91440"/>
+            <a:ext cx="2606421" cy="274320"/>
+          </a:xfrm>
+          <a:prstGeom prst="rect">
+            <a:avLst/>
+          </a:prstGeom>
+          <a:noFill/>
+          <a:ln/>
+        </p:spPr>
+        <p:txBody>
+          <a:bodyPr wrap="square" lIns="0" tIns="0" rIns="0" bIns="0" rtlCol="0" anchor="ctr"/>
+          <a:lstStyle/>
+          <a:p>
+            <a:pPr indent="0" marL="0">
+              <a:buNone/>
+            </a:pPr>
+            <a:r>
+              <a:rPr lang="en-US" sz="1100" b="1" dirty="0">
+                <a:solidFill>
+                  <a:srgbClr val="075985"/>
+                </a:solidFill>
+                <a:latin typeface="Calibri" pitchFamily="34" charset="0"/>
+                <a:ea typeface="Calibri" pitchFamily="34" charset="-122"/>
+                <a:cs typeface="Calibri" pitchFamily="34" charset="-120"/>
+              </a:rPr>
+              <a:t>UNDERSTAND NOW</a:t>
+            </a:r>
+            <a:pPr indent="0" marL="0">
+              <a:buNone/>
+            </a:pPr>
+            <a:r>
+              <a:rPr lang="en-US" sz="1100" dirty="0">
+                <a:solidFill>
+                  <a:srgbClr val="075985"/>
+                </a:solidFill>
+                <a:latin typeface="Calibri" pitchFamily="34" charset="0"/>
+                <a:ea typeface="Calibri" pitchFamily="34" charset="-122"/>
+                <a:cs typeface="Calibri" pitchFamily="34" charset="-120"/>
+              </a:rPr>
+              <a:t> · base conversions</a:t>
+            </a:r>
+            <a:endParaRPr lang="en-US" sz="1100" dirty="0"/>
+          </a:p>
+        </p:txBody>
+      </p:sp>
+      <p:sp>
+        <p:nvSpPr>
           <p:cNvPr id="25" name="Slide Number Placeholder 0"/>
           <p:cNvSpPr>
             <a:spLocks noGrp="1"/>
@@ -21315,6 +22762,133 @@
               <a:t>If each digit is written in pure binary, the bits of a number are the same in every base b = 2^k: group them from the right, k at a time. Example: 13 = 1101 in binary = 15 in octal = D in hexadecimal.</a:t>
             </a:r>
             <a:endParaRPr lang="en-US" sz="1650" dirty="0"/>
+          </a:p>
+        </p:txBody>
+      </p:sp>
+      <p:sp>
+        <p:nvSpPr>
+          <p:cNvPr id="23" name="Shape 21"/>
+          <p:cNvSpPr/>
+          <p:nvPr/>
+        </p:nvSpPr>
+        <p:spPr>
+          <a:xfrm>
+            <a:off x="8616010" y="91440"/>
+            <a:ext cx="3027045" cy="274320"/>
+          </a:xfrm>
+          <a:prstGeom prst="rect">
+            <a:avLst/>
+          </a:prstGeom>
+          <a:solidFill>
+            <a:srgbClr val="E0F2FE"/>
+          </a:solidFill>
+          <a:ln w="12700">
+            <a:solidFill>
+              <a:srgbClr val="0369A1"/>
+            </a:solidFill>
+            <a:prstDash val="solid"/>
+          </a:ln>
+        </p:spPr>
+      </p:sp>
+      <p:sp>
+        <p:nvSpPr>
+          <p:cNvPr id="24" name="Shape 22"/>
+          <p:cNvSpPr/>
+          <p:nvPr/>
+        </p:nvSpPr>
+        <p:spPr>
+          <a:xfrm>
+            <a:off x="8616010" y="91440"/>
+            <a:ext cx="73152" cy="274320"/>
+          </a:xfrm>
+          <a:prstGeom prst="rect">
+            <a:avLst/>
+          </a:prstGeom>
+          <a:solidFill>
+            <a:srgbClr val="0369A1"/>
+          </a:solidFill>
+          <a:ln w="12700">
+            <a:solidFill>
+              <a:srgbClr val="0369A1"/>
+            </a:solidFill>
+            <a:prstDash val="solid"/>
+          </a:ln>
+        </p:spPr>
+      </p:sp>
+      <p:pic>
+        <p:nvPicPr>
+          <p:cNvPr id="25" name="Image 0" descr="preencoded.png">    </p:cNvPr>
+          <p:cNvPicPr>
+            <a:picLocks noChangeAspect="1"/>
+          </p:cNvPicPr>
+          <p:nvPr/>
+        </p:nvPicPr>
+        <p:blipFill>
+          <a:blip r:embed="rId1"/>
+          <a:stretch>
+            <a:fillRect/>
+          </a:stretch>
+        </p:blipFill>
+        <p:spPr>
+          <a:xfrm>
+            <a:off x="8744026" y="128016"/>
+            <a:ext cx="201168" cy="201168"/>
+          </a:xfrm>
+          <a:prstGeom prst="rect">
+            <a:avLst/>
+          </a:prstGeom>
+        </p:spPr>
+      </p:pic>
+      <p:sp>
+        <p:nvSpPr>
+          <p:cNvPr id="26" name="Text 23"/>
+          <p:cNvSpPr txBox="1"/>
+          <p:nvPr/>
+        </p:nvSpPr>
+        <p:spPr>
+          <a:xfrm>
+            <a:off x="9000058" y="91440"/>
+            <a:ext cx="2606421" cy="274320"/>
+          </a:xfrm>
+          <a:prstGeom prst="rect">
+            <a:avLst/>
+          </a:prstGeom>
+          <a:noFill/>
+          <a:ln/>
+        </p:spPr>
+        <p:txBody>
+          <a:bodyPr wrap="square" lIns="0" tIns="0" rIns="0" bIns="0" rtlCol="0" anchor="ctr"/>
+          <a:lstStyle/>
+          <a:p>
+            <a:pPr indent="0" marL="0">
+              <a:buNone/>
+            </a:pPr>
+            <a:r>
+              <a:rPr lang="en-US" sz="1100" b="1" dirty="0">
+                <a:solidFill>
+                  <a:srgbClr val="075985"/>
+                </a:solidFill>
+                <a:latin typeface="Calibri" pitchFamily="34" charset="0"/>
+                <a:ea typeface="Calibri" pitchFamily="34" charset="-122"/>
+                <a:cs typeface="Calibri" pitchFamily="34" charset="-120"/>
+              </a:rPr>
+              <a:t>UNDERSTAND NOW</a:t>
+            </a:r>
+            <a:pPr indent="0" marL="0">
+              <a:buNone/>
+            </a:pPr>
+            <a:r>
+              <a:rPr lang="en-US" sz="1100" dirty="0">
+                <a:solidFill>
+                  <a:srgbClr val="075985"/>
+                </a:solidFill>
+                <a:latin typeface="Calibri" pitchFamily="34" charset="0"/>
+                <a:ea typeface="Calibri" pitchFamily="34" charset="-122"/>
+                <a:cs typeface="Calibri" pitchFamily="34" charset="-120"/>
+              </a:rPr>
+              <a:t> · base conversions</a:t>
+            </a:r>
+            <a:endParaRPr lang="en-US" sz="1100" dirty="0"/>
           </a:p>
         </p:txBody>
       </p:sp>
@@ -24956,6 +26530,133 @@
       </p:sp>
       <p:sp>
         <p:nvSpPr>
+          <p:cNvPr id="15" name="Shape 10"/>
+          <p:cNvSpPr/>
+          <p:nvPr/>
+        </p:nvSpPr>
+        <p:spPr>
+          <a:xfrm>
+            <a:off x="8616010" y="91440"/>
+            <a:ext cx="3027045" cy="274320"/>
+          </a:xfrm>
+          <a:prstGeom prst="rect">
+            <a:avLst/>
+          </a:prstGeom>
+          <a:solidFill>
+            <a:srgbClr val="E0F2FE"/>
+          </a:solidFill>
+          <a:ln w="12700">
+            <a:solidFill>
+              <a:srgbClr val="0369A1"/>
+            </a:solidFill>
+            <a:prstDash val="solid"/>
+          </a:ln>
+        </p:spPr>
+      </p:sp>
+      <p:sp>
+        <p:nvSpPr>
+          <p:cNvPr id="16" name="Shape 11"/>
+          <p:cNvSpPr/>
+          <p:nvPr/>
+        </p:nvSpPr>
+        <p:spPr>
+          <a:xfrm>
+            <a:off x="8616010" y="91440"/>
+            <a:ext cx="73152" cy="274320"/>
+          </a:xfrm>
+          <a:prstGeom prst="rect">
+            <a:avLst/>
+          </a:prstGeom>
+          <a:solidFill>
+            <a:srgbClr val="0369A1"/>
+          </a:solidFill>
+          <a:ln w="12700">
+            <a:solidFill>
+              <a:srgbClr val="0369A1"/>
+            </a:solidFill>
+            <a:prstDash val="solid"/>
+          </a:ln>
+        </p:spPr>
+      </p:sp>
+      <p:pic>
+        <p:nvPicPr>
+          <p:cNvPr id="17" name="Image 0" descr="preencoded.png">    </p:cNvPr>
+          <p:cNvPicPr>
+            <a:picLocks noChangeAspect="1"/>
+          </p:cNvPicPr>
+          <p:nvPr/>
+        </p:nvPicPr>
+        <p:blipFill>
+          <a:blip r:embed="rId1"/>
+          <a:stretch>
+            <a:fillRect/>
+          </a:stretch>
+        </p:blipFill>
+        <p:spPr>
+          <a:xfrm>
+            <a:off x="8744026" y="128016"/>
+            <a:ext cx="201168" cy="201168"/>
+          </a:xfrm>
+          <a:prstGeom prst="rect">
+            <a:avLst/>
+          </a:prstGeom>
+        </p:spPr>
+      </p:pic>
+      <p:sp>
+        <p:nvSpPr>
+          <p:cNvPr id="18" name="Text 12"/>
+          <p:cNvSpPr txBox="1"/>
+          <p:nvPr/>
+        </p:nvSpPr>
+        <p:spPr>
+          <a:xfrm>
+            <a:off x="9000058" y="91440"/>
+            <a:ext cx="2606421" cy="274320"/>
+          </a:xfrm>
+          <a:prstGeom prst="rect">
+            <a:avLst/>
+          </a:prstGeom>
+          <a:noFill/>
+          <a:ln/>
+        </p:spPr>
+        <p:txBody>
+          <a:bodyPr wrap="square" lIns="0" tIns="0" rIns="0" bIns="0" rtlCol="0" anchor="ctr"/>
+          <a:lstStyle/>
+          <a:p>
+            <a:pPr indent="0" marL="0">
+              <a:buNone/>
+            </a:pPr>
+            <a:r>
+              <a:rPr lang="en-US" sz="1100" b="1" dirty="0">
+                <a:solidFill>
+                  <a:srgbClr val="075985"/>
+                </a:solidFill>
+                <a:latin typeface="Calibri" pitchFamily="34" charset="0"/>
+                <a:ea typeface="Calibri" pitchFamily="34" charset="-122"/>
+                <a:cs typeface="Calibri" pitchFamily="34" charset="-120"/>
+              </a:rPr>
+              <a:t>UNDERSTAND NOW</a:t>
+            </a:r>
+            <a:pPr indent="0" marL="0">
+              <a:buNone/>
+            </a:pPr>
+            <a:r>
+              <a:rPr lang="en-US" sz="1100" dirty="0">
+                <a:solidFill>
+                  <a:srgbClr val="075985"/>
+                </a:solidFill>
+                <a:latin typeface="Calibri" pitchFamily="34" charset="0"/>
+                <a:ea typeface="Calibri" pitchFamily="34" charset="-122"/>
+                <a:cs typeface="Calibri" pitchFamily="34" charset="-120"/>
+              </a:rPr>
+              <a:t> · base conversions</a:t>
+            </a:r>
+            <a:endParaRPr lang="en-US" sz="1100" dirty="0"/>
+          </a:p>
+        </p:txBody>
+      </p:sp>
+      <p:sp>
+        <p:nvSpPr>
           <p:cNvPr id="25" name="Slide Number Placeholder 0"/>
           <p:cNvSpPr>
             <a:spLocks noGrp="1"/>
@@ -27448,6 +29149,133 @@
               <a:t>A fraction that is finite in base 10 can be periodic in base 2. With a finite number of bits it must be cut: this is where the approximation errors of real numbers come from (Lecture 06).</a:t>
             </a:r>
             <a:endParaRPr lang="en-US" sz="1650" dirty="0"/>
+          </a:p>
+        </p:txBody>
+      </p:sp>
+      <p:sp>
+        <p:nvSpPr>
+          <p:cNvPr id="12" name="Shape 8"/>
+          <p:cNvSpPr/>
+          <p:nvPr/>
+        </p:nvSpPr>
+        <p:spPr>
+          <a:xfrm>
+            <a:off x="8616010" y="91440"/>
+            <a:ext cx="3027045" cy="274320"/>
+          </a:xfrm>
+          <a:prstGeom prst="rect">
+            <a:avLst/>
+          </a:prstGeom>
+          <a:solidFill>
+            <a:srgbClr val="E0F2FE"/>
+          </a:solidFill>
+          <a:ln w="12700">
+            <a:solidFill>
+              <a:srgbClr val="0369A1"/>
+            </a:solidFill>
+            <a:prstDash val="solid"/>
+          </a:ln>
+        </p:spPr>
+      </p:sp>
+      <p:sp>
+        <p:nvSpPr>
+          <p:cNvPr id="13" name="Shape 9"/>
+          <p:cNvSpPr/>
+          <p:nvPr/>
+        </p:nvSpPr>
+        <p:spPr>
+          <a:xfrm>
+            <a:off x="8616010" y="91440"/>
+            <a:ext cx="73152" cy="274320"/>
+          </a:xfrm>
+          <a:prstGeom prst="rect">
+            <a:avLst/>
+          </a:prstGeom>
+          <a:solidFill>
+            <a:srgbClr val="0369A1"/>
+          </a:solidFill>
+          <a:ln w="12700">
+            <a:solidFill>
+              <a:srgbClr val="0369A1"/>
+            </a:solidFill>
+            <a:prstDash val="solid"/>
+          </a:ln>
+        </p:spPr>
+      </p:sp>
+      <p:pic>
+        <p:nvPicPr>
+          <p:cNvPr id="14" name="Image 0" descr="preencoded.png">    </p:cNvPr>
+          <p:cNvPicPr>
+            <a:picLocks noChangeAspect="1"/>
+          </p:cNvPicPr>
+          <p:nvPr/>
+        </p:nvPicPr>
+        <p:blipFill>
+          <a:blip r:embed="rId1"/>
+          <a:stretch>
+            <a:fillRect/>
+          </a:stretch>
+        </p:blipFill>
+        <p:spPr>
+          <a:xfrm>
+            <a:off x="8744026" y="128016"/>
+            <a:ext cx="201168" cy="201168"/>
+          </a:xfrm>
+          <a:prstGeom prst="rect">
+            <a:avLst/>
+          </a:prstGeom>
+        </p:spPr>
+      </p:pic>
+      <p:sp>
+        <p:nvSpPr>
+          <p:cNvPr id="15" name="Text 10"/>
+          <p:cNvSpPr txBox="1"/>
+          <p:nvPr/>
+        </p:nvSpPr>
+        <p:spPr>
+          <a:xfrm>
+            <a:off x="9000058" y="91440"/>
+            <a:ext cx="2606421" cy="274320"/>
+          </a:xfrm>
+          <a:prstGeom prst="rect">
+            <a:avLst/>
+          </a:prstGeom>
+          <a:noFill/>
+          <a:ln/>
+        </p:spPr>
+        <p:txBody>
+          <a:bodyPr wrap="square" lIns="0" tIns="0" rIns="0" bIns="0" rtlCol="0" anchor="ctr"/>
+          <a:lstStyle/>
+          <a:p>
+            <a:pPr indent="0" marL="0">
+              <a:buNone/>
+            </a:pPr>
+            <a:r>
+              <a:rPr lang="en-US" sz="1100" b="1" dirty="0">
+                <a:solidFill>
+                  <a:srgbClr val="075985"/>
+                </a:solidFill>
+                <a:latin typeface="Calibri" pitchFamily="34" charset="0"/>
+                <a:ea typeface="Calibri" pitchFamily="34" charset="-122"/>
+                <a:cs typeface="Calibri" pitchFamily="34" charset="-120"/>
+              </a:rPr>
+              <a:t>UNDERSTAND NOW</a:t>
+            </a:r>
+            <a:pPr indent="0" marL="0">
+              <a:buNone/>
+            </a:pPr>
+            <a:r>
+              <a:rPr lang="en-US" sz="1100" dirty="0">
+                <a:solidFill>
+                  <a:srgbClr val="075985"/>
+                </a:solidFill>
+                <a:latin typeface="Calibri" pitchFamily="34" charset="0"/>
+                <a:ea typeface="Calibri" pitchFamily="34" charset="-122"/>
+                <a:cs typeface="Calibri" pitchFamily="34" charset="-120"/>
+              </a:rPr>
+              <a:t> · base conversions</a:t>
+            </a:r>
+            <a:endParaRPr lang="en-US" sz="1100" dirty="0"/>
           </a:p>
         </p:txBody>
       </p:sp>
@@ -30212,6 +32040,133 @@
       </p:graphicFrame>
       <p:sp>
         <p:nvSpPr>
+          <p:cNvPr id="41" name="Shape 38"/>
+          <p:cNvSpPr/>
+          <p:nvPr/>
+        </p:nvSpPr>
+        <p:spPr>
+          <a:xfrm>
+            <a:off x="8287715" y="91440"/>
+            <a:ext cx="3355340" cy="274320"/>
+          </a:xfrm>
+          <a:prstGeom prst="rect">
+            <a:avLst/>
+          </a:prstGeom>
+          <a:solidFill>
+            <a:srgbClr val="E0F2FE"/>
+          </a:solidFill>
+          <a:ln w="12700">
+            <a:solidFill>
+              <a:srgbClr val="0369A1"/>
+            </a:solidFill>
+            <a:prstDash val="solid"/>
+          </a:ln>
+        </p:spPr>
+      </p:sp>
+      <p:sp>
+        <p:nvSpPr>
+          <p:cNvPr id="42" name="Shape 39"/>
+          <p:cNvSpPr/>
+          <p:nvPr/>
+        </p:nvSpPr>
+        <p:spPr>
+          <a:xfrm>
+            <a:off x="8287715" y="91440"/>
+            <a:ext cx="73152" cy="274320"/>
+          </a:xfrm>
+          <a:prstGeom prst="rect">
+            <a:avLst/>
+          </a:prstGeom>
+          <a:solidFill>
+            <a:srgbClr val="0369A1"/>
+          </a:solidFill>
+          <a:ln w="12700">
+            <a:solidFill>
+              <a:srgbClr val="0369A1"/>
+            </a:solidFill>
+            <a:prstDash val="solid"/>
+          </a:ln>
+        </p:spPr>
+      </p:sp>
+      <p:pic>
+        <p:nvPicPr>
+          <p:cNvPr id="43" name="Image 0" descr="preencoded.png">    </p:cNvPr>
+          <p:cNvPicPr>
+            <a:picLocks noChangeAspect="1"/>
+          </p:cNvPicPr>
+          <p:nvPr/>
+        </p:nvPicPr>
+        <p:blipFill>
+          <a:blip r:embed="rId1"/>
+          <a:stretch>
+            <a:fillRect/>
+          </a:stretch>
+        </p:blipFill>
+        <p:spPr>
+          <a:xfrm>
+            <a:off x="8415731" y="128016"/>
+            <a:ext cx="201168" cy="201168"/>
+          </a:xfrm>
+          <a:prstGeom prst="rect">
+            <a:avLst/>
+          </a:prstGeom>
+        </p:spPr>
+      </p:pic>
+      <p:sp>
+        <p:nvSpPr>
+          <p:cNvPr id="44" name="Text 40"/>
+          <p:cNvSpPr txBox="1"/>
+          <p:nvPr/>
+        </p:nvSpPr>
+        <p:spPr>
+          <a:xfrm>
+            <a:off x="8671763" y="91440"/>
+            <a:ext cx="2934716" cy="274320"/>
+          </a:xfrm>
+          <a:prstGeom prst="rect">
+            <a:avLst/>
+          </a:prstGeom>
+          <a:noFill/>
+          <a:ln/>
+        </p:spPr>
+        <p:txBody>
+          <a:bodyPr wrap="square" lIns="0" tIns="0" rIns="0" bIns="0" rtlCol="0" anchor="ctr"/>
+          <a:lstStyle/>
+          <a:p>
+            <a:pPr indent="0" marL="0">
+              <a:buNone/>
+            </a:pPr>
+            <a:r>
+              <a:rPr lang="en-US" sz="1100" b="1" dirty="0">
+                <a:solidFill>
+                  <a:srgbClr val="075985"/>
+                </a:solidFill>
+                <a:latin typeface="Calibri" pitchFamily="34" charset="0"/>
+                <a:ea typeface="Calibri" pitchFamily="34" charset="-122"/>
+                <a:cs typeface="Calibri" pitchFamily="34" charset="-120"/>
+              </a:rPr>
+              <a:t>UNDERSTAND NOW</a:t>
+            </a:r>
+            <a:pPr indent="0" marL="0">
+              <a:buNone/>
+            </a:pPr>
+            <a:r>
+              <a:rPr lang="en-US" sz="1100" dirty="0">
+                <a:solidFill>
+                  <a:srgbClr val="075985"/>
+                </a:solidFill>
+                <a:latin typeface="Calibri" pitchFamily="34" charset="0"/>
+                <a:ea typeface="Calibri" pitchFamily="34" charset="-122"/>
+                <a:cs typeface="Calibri" pitchFamily="34" charset="-120"/>
+              </a:rPr>
+              <a:t> · naturals and overflow</a:t>
+            </a:r>
+            <a:endParaRPr lang="en-US" sz="1100" dirty="0"/>
+          </a:p>
+        </p:txBody>
+      </p:sp>
+      <p:sp>
+        <p:nvSpPr>
           <p:cNvPr id="25" name="Slide Number Placeholder 0"/>
           <p:cNvSpPr>
             <a:spLocks noGrp="1"/>
@@ -30699,6 +32654,133 @@
       </p:sp>
       <p:sp>
         <p:nvSpPr>
+          <p:cNvPr id="14" name="Shape 12"/>
+          <p:cNvSpPr/>
+          <p:nvPr/>
+        </p:nvSpPr>
+        <p:spPr>
+          <a:xfrm>
+            <a:off x="8287715" y="91440"/>
+            <a:ext cx="3355340" cy="274320"/>
+          </a:xfrm>
+          <a:prstGeom prst="rect">
+            <a:avLst/>
+          </a:prstGeom>
+          <a:solidFill>
+            <a:srgbClr val="E0F2FE"/>
+          </a:solidFill>
+          <a:ln w="12700">
+            <a:solidFill>
+              <a:srgbClr val="0369A1"/>
+            </a:solidFill>
+            <a:prstDash val="solid"/>
+          </a:ln>
+        </p:spPr>
+      </p:sp>
+      <p:sp>
+        <p:nvSpPr>
+          <p:cNvPr id="15" name="Shape 13"/>
+          <p:cNvSpPr/>
+          <p:nvPr/>
+        </p:nvSpPr>
+        <p:spPr>
+          <a:xfrm>
+            <a:off x="8287715" y="91440"/>
+            <a:ext cx="73152" cy="274320"/>
+          </a:xfrm>
+          <a:prstGeom prst="rect">
+            <a:avLst/>
+          </a:prstGeom>
+          <a:solidFill>
+            <a:srgbClr val="0369A1"/>
+          </a:solidFill>
+          <a:ln w="12700">
+            <a:solidFill>
+              <a:srgbClr val="0369A1"/>
+            </a:solidFill>
+            <a:prstDash val="solid"/>
+          </a:ln>
+        </p:spPr>
+      </p:sp>
+      <p:pic>
+        <p:nvPicPr>
+          <p:cNvPr id="16" name="Image 0" descr="preencoded.png">    </p:cNvPr>
+          <p:cNvPicPr>
+            <a:picLocks noChangeAspect="1"/>
+          </p:cNvPicPr>
+          <p:nvPr/>
+        </p:nvPicPr>
+        <p:blipFill>
+          <a:blip r:embed="rId1"/>
+          <a:stretch>
+            <a:fillRect/>
+          </a:stretch>
+        </p:blipFill>
+        <p:spPr>
+          <a:xfrm>
+            <a:off x="8415731" y="128016"/>
+            <a:ext cx="201168" cy="201168"/>
+          </a:xfrm>
+          <a:prstGeom prst="rect">
+            <a:avLst/>
+          </a:prstGeom>
+        </p:spPr>
+      </p:pic>
+      <p:sp>
+        <p:nvSpPr>
+          <p:cNvPr id="17" name="Text 14"/>
+          <p:cNvSpPr txBox="1"/>
+          <p:nvPr/>
+        </p:nvSpPr>
+        <p:spPr>
+          <a:xfrm>
+            <a:off x="8671763" y="91440"/>
+            <a:ext cx="2934716" cy="274320"/>
+          </a:xfrm>
+          <a:prstGeom prst="rect">
+            <a:avLst/>
+          </a:prstGeom>
+          <a:noFill/>
+          <a:ln/>
+        </p:spPr>
+        <p:txBody>
+          <a:bodyPr wrap="square" lIns="0" tIns="0" rIns="0" bIns="0" rtlCol="0" anchor="ctr"/>
+          <a:lstStyle/>
+          <a:p>
+            <a:pPr indent="0" marL="0">
+              <a:buNone/>
+            </a:pPr>
+            <a:r>
+              <a:rPr lang="en-US" sz="1100" b="1" dirty="0">
+                <a:solidFill>
+                  <a:srgbClr val="075985"/>
+                </a:solidFill>
+                <a:latin typeface="Calibri" pitchFamily="34" charset="0"/>
+                <a:ea typeface="Calibri" pitchFamily="34" charset="-122"/>
+                <a:cs typeface="Calibri" pitchFamily="34" charset="-120"/>
+              </a:rPr>
+              <a:t>UNDERSTAND NOW</a:t>
+            </a:r>
+            <a:pPr indent="0" marL="0">
+              <a:buNone/>
+            </a:pPr>
+            <a:r>
+              <a:rPr lang="en-US" sz="1100" dirty="0">
+                <a:solidFill>
+                  <a:srgbClr val="075985"/>
+                </a:solidFill>
+                <a:latin typeface="Calibri" pitchFamily="34" charset="0"/>
+                <a:ea typeface="Calibri" pitchFamily="34" charset="-122"/>
+                <a:cs typeface="Calibri" pitchFamily="34" charset="-120"/>
+              </a:rPr>
+              <a:t> · naturals and overflow</a:t>
+            </a:r>
+            <a:endParaRPr lang="en-US" sz="1100" dirty="0"/>
+          </a:p>
+        </p:txBody>
+      </p:sp>
+      <p:sp>
+        <p:nvSpPr>
           <p:cNvPr id="25" name="Slide Number Placeholder 0"/>
           <p:cNvSpPr>
             <a:spLocks noGrp="1"/>
@@ -32013,6 +34095,133 @@
               <a:t>A product needs twice the bits: on RV32 mul gives the low 32 bits and mulhu the high 32</a:t>
             </a:r>
             <a:endParaRPr lang="en-US" sz="2200" dirty="0"/>
+          </a:p>
+        </p:txBody>
+      </p:sp>
+      <p:sp>
+        <p:nvSpPr>
+          <p:cNvPr id="29" name="Shape 27"/>
+          <p:cNvSpPr/>
+          <p:nvPr/>
+        </p:nvSpPr>
+        <p:spPr>
+          <a:xfrm>
+            <a:off x="8287715" y="91440"/>
+            <a:ext cx="3355340" cy="274320"/>
+          </a:xfrm>
+          <a:prstGeom prst="rect">
+            <a:avLst/>
+          </a:prstGeom>
+          <a:solidFill>
+            <a:srgbClr val="E0F2FE"/>
+          </a:solidFill>
+          <a:ln w="12700">
+            <a:solidFill>
+              <a:srgbClr val="0369A1"/>
+            </a:solidFill>
+            <a:prstDash val="solid"/>
+          </a:ln>
+        </p:spPr>
+      </p:sp>
+      <p:sp>
+        <p:nvSpPr>
+          <p:cNvPr id="30" name="Shape 28"/>
+          <p:cNvSpPr/>
+          <p:nvPr/>
+        </p:nvSpPr>
+        <p:spPr>
+          <a:xfrm>
+            <a:off x="8287715" y="91440"/>
+            <a:ext cx="73152" cy="274320"/>
+          </a:xfrm>
+          <a:prstGeom prst="rect">
+            <a:avLst/>
+          </a:prstGeom>
+          <a:solidFill>
+            <a:srgbClr val="0369A1"/>
+          </a:solidFill>
+          <a:ln w="12700">
+            <a:solidFill>
+              <a:srgbClr val="0369A1"/>
+            </a:solidFill>
+            <a:prstDash val="solid"/>
+          </a:ln>
+        </p:spPr>
+      </p:sp>
+      <p:pic>
+        <p:nvPicPr>
+          <p:cNvPr id="31" name="Image 0" descr="preencoded.png">    </p:cNvPr>
+          <p:cNvPicPr>
+            <a:picLocks noChangeAspect="1"/>
+          </p:cNvPicPr>
+          <p:nvPr/>
+        </p:nvPicPr>
+        <p:blipFill>
+          <a:blip r:embed="rId1"/>
+          <a:stretch>
+            <a:fillRect/>
+          </a:stretch>
+        </p:blipFill>
+        <p:spPr>
+          <a:xfrm>
+            <a:off x="8415731" y="128016"/>
+            <a:ext cx="201168" cy="201168"/>
+          </a:xfrm>
+          <a:prstGeom prst="rect">
+            <a:avLst/>
+          </a:prstGeom>
+        </p:spPr>
+      </p:pic>
+      <p:sp>
+        <p:nvSpPr>
+          <p:cNvPr id="32" name="Text 29"/>
+          <p:cNvSpPr txBox="1"/>
+          <p:nvPr/>
+        </p:nvSpPr>
+        <p:spPr>
+          <a:xfrm>
+            <a:off x="8671763" y="91440"/>
+            <a:ext cx="2934716" cy="274320"/>
+          </a:xfrm>
+          <a:prstGeom prst="rect">
+            <a:avLst/>
+          </a:prstGeom>
+          <a:noFill/>
+          <a:ln/>
+        </p:spPr>
+        <p:txBody>
+          <a:bodyPr wrap="square" lIns="0" tIns="0" rIns="0" bIns="0" rtlCol="0" anchor="ctr"/>
+          <a:lstStyle/>
+          <a:p>
+            <a:pPr indent="0" marL="0">
+              <a:buNone/>
+            </a:pPr>
+            <a:r>
+              <a:rPr lang="en-US" sz="1100" b="1" dirty="0">
+                <a:solidFill>
+                  <a:srgbClr val="075985"/>
+                </a:solidFill>
+                <a:latin typeface="Calibri" pitchFamily="34" charset="0"/>
+                <a:ea typeface="Calibri" pitchFamily="34" charset="-122"/>
+                <a:cs typeface="Calibri" pitchFamily="34" charset="-120"/>
+              </a:rPr>
+              <a:t>UNDERSTAND NOW</a:t>
+            </a:r>
+            <a:pPr indent="0" marL="0">
+              <a:buNone/>
+            </a:pPr>
+            <a:r>
+              <a:rPr lang="en-US" sz="1100" dirty="0">
+                <a:solidFill>
+                  <a:srgbClr val="075985"/>
+                </a:solidFill>
+                <a:latin typeface="Calibri" pitchFamily="34" charset="0"/>
+                <a:ea typeface="Calibri" pitchFamily="34" charset="-122"/>
+                <a:cs typeface="Calibri" pitchFamily="34" charset="-120"/>
+              </a:rPr>
+              <a:t> · naturals and overflow</a:t>
+            </a:r>
+            <a:endParaRPr lang="en-US" sz="1100" dirty="0"/>
           </a:p>
         </p:txBody>
       </p:sp>

--- a/en/slides/05-Computer_Architecture-Number_Representation_Integers.pptx
+++ b/en/slides/05-Computer_Architecture-Number_Representation_Integers.pptx
@@ -126,13 +126,13 @@
   <p:extLst>
     <p:ext uri="{521415D9-36F7-43E2-AB2F-B90AF26B5E84}">
       <p14:sectionLst xmlns:p14="http://schemas.microsoft.com/office/powerpoint/2010/main">
-        <p14:section name="Opening" id="{7f894fae-9957-36b8-fd72-e15e6412a0a2}">
+        <p14:section name="Opening" id="{6bd44d89-df45-cd8a-8f71-de206dcb408d}">
           <p14:sldIdLst>
             <p14:sldId id="256"/>
             <p14:sldId id="257"/>
           </p14:sldIdLst>
         </p14:section>
-        <p14:section name="Bases and conversions" id="{ec3b870b-163b-c245-4836-8c600ec8c6d7}">
+        <p14:section name="Bases and conversions" id="{a70842eb-5196-b4bb-5164-7b45af3edb74}">
           <p14:sldIdLst>
             <p14:sldId id="258"/>
             <p14:sldId id="259"/>
@@ -140,14 +140,14 @@
             <p14:sldId id="261"/>
           </p14:sldIdLst>
         </p14:section>
-        <p14:section name="Natural numbers and overflow" id="{191c5dcc-f9fe-0e48-1a2e-5af1675787f2}">
+        <p14:section name="Natural numbers and overflow" id="{38c54b6a-bd0c-e719-74a7-dffda5890352}">
           <p14:sldIdLst>
             <p14:sldId id="262"/>
             <p14:sldId id="263"/>
             <p14:sldId id="264"/>
           </p14:sldIdLst>
         </p14:section>
-        <p14:section name="Signed integers" id="{d0db5711-742b-65ef-1a65-3c5f8a7e5e00}">
+        <p14:section name="Signed integers" id="{a07cda80-175f-0f5e-5e23-7997e92498c0}">
           <p14:sldIdLst>
             <p14:sldId id="265"/>
             <p14:sldId id="266"/>
@@ -157,7 +157,7 @@
             <p14:sldId id="270"/>
           </p14:sldIdLst>
         </p14:section>
-        <p14:section name="Back to the machine" id="{605919bb-a010-f9b2-06c8-32cd9fbccd56}">
+        <p14:section name="Back to the machine" id="{d12c793a-2b2c-b18d-60b3-cc085a00f8aa}">
           <p14:sldIdLst>
             <p14:sldId id="271"/>
             <p14:sldId id="272"/>

--- a/en/slides/05-Computer_Architecture-Number_Representation_Integers.pptx
+++ b/en/slides/05-Computer_Architecture-Number_Representation_Integers.pptx
@@ -126,13 +126,13 @@
   <p:extLst>
     <p:ext uri="{521415D9-36F7-43E2-AB2F-B90AF26B5E84}">
       <p14:sectionLst xmlns:p14="http://schemas.microsoft.com/office/powerpoint/2010/main">
-        <p14:section name="Opening" id="{6bd44d89-df45-cd8a-8f71-de206dcb408d}">
+        <p14:section name="Opening" id="{beaeb916-4d6a-2011-998b-16b1bc45d0ae}">
           <p14:sldIdLst>
             <p14:sldId id="256"/>
             <p14:sldId id="257"/>
           </p14:sldIdLst>
         </p14:section>
-        <p14:section name="Bases and conversions" id="{a70842eb-5196-b4bb-5164-7b45af3edb74}">
+        <p14:section name="Bases and conversions" id="{59e6a70d-fe77-754f-1ad3-7261f9974d98}">
           <p14:sldIdLst>
             <p14:sldId id="258"/>
             <p14:sldId id="259"/>
@@ -140,14 +140,14 @@
             <p14:sldId id="261"/>
           </p14:sldIdLst>
         </p14:section>
-        <p14:section name="Natural numbers and overflow" id="{38c54b6a-bd0c-e719-74a7-dffda5890352}">
+        <p14:section name="Natural numbers and overflow" id="{51f7baa9-a593-0bca-30e7-91a660c9c9a6}">
           <p14:sldIdLst>
             <p14:sldId id="262"/>
             <p14:sldId id="263"/>
             <p14:sldId id="264"/>
           </p14:sldIdLst>
         </p14:section>
-        <p14:section name="Signed integers" id="{a07cda80-175f-0f5e-5e23-7997e92498c0}">
+        <p14:section name="Signed integers" id="{67020e5e-f924-b31b-e941-6d372b7bba46}">
           <p14:sldIdLst>
             <p14:sldId id="265"/>
             <p14:sldId id="266"/>
@@ -157,7 +157,7 @@
             <p14:sldId id="270"/>
           </p14:sldIdLst>
         </p14:section>
-        <p14:section name="Back to the machine" id="{d12c793a-2b2c-b18d-60b3-cc085a00f8aa}">
+        <p14:section name="Back to the machine" id="{c1f4f005-8d79-382c-921f-0b6ab45059b5}">
           <p14:sldIdLst>
             <p14:sldId id="271"/>
             <p14:sldId id="272"/>
@@ -570,7 +570,7 @@
           <a:p>
             <a:r>
               <a:rPr lang="en-US" dirty="0"/>
-              <a:t>This lecture begins the formal treatment of numbers. It opens with a small surprise on the machine, a marker that walks left past zero and shows FFFFFFFF, and it ends by explaining exactly why that happens. In between you learn to convert between bases, to say which numbers fit in a given number of bits, and to write negative numbers. The quotation by Trilussa, the One arguing with the Zero, is a reminder that in a positional system even a zero has its weight.
+              <a:t>This lecture begins the formal treatment of numerical representation. It opens with a puzzle observed on the machine, a marker that moves left past zero and displays FFFFFFFF, and closes by explaining it completely. Between the two, the student learns to convert between bases, to determine which numbers a given number of bits can represent, and to encode negative numbers. The epigraph from Trilussa, in which the One mocks the Zero, carries a precise mathematical point: in a positional system the zero, worthless on its own, gives every other digit its weight.
 Learning status: UNDERSTAND NOW, by the end of this lecture you explain it, trace it and apply it on your own; USE NOW, you follow and use the recipe today; how it works inside is explained later, or is not part of the course; UNDERSTAND LATER, recognise the name and what it is for; a later lecture explains it. A slide without a badge is context: a story, an example, a question, an exercise.
 Learning status of this lecture. UNDERSTAND NOW: two's complement; base conversions; naturals and overflow; shifts as multiplications; sign and magnitude; signed or unsigned instructions; sign extension. USE NOW: the PRG32 runtime calls, the complete program, the PRG32 tools (used, not studied, in this course). UNDERSTAND LATER: nothing. A slide without a badge is context: a story, an example, a question, an exercise.
 For the lecturer: Original quotation (Romanesco): «Conterò poco, è vero: - diceva l'Uno ar Zero - ma tu che vali? Gnente: propio gnente.» Spiral: the lecture opens with the marker of textbook lab 06 moving left past zero, and closes by explaining it.</a:t>
@@ -661,7 +661,7 @@
           <a:p>
             <a:r>
               <a:rPr lang="en-US" dirty="0"/>
-              <a:t>The most natural idea: use the leftmost bit for the sign and the remaining bits for the magnitude. It is easy for a person to read, and it has two defects. Zero has two representations, plus zero and minus zero. And arithmetic is awkward: to add two numbers of opposite sign the circuit must compare the magnitudes, subtract the smaller from the larger and choose the sign. A representation that makes addition complicated is a poor law in the sense of the previous section.
+              <a:t>The most natural idea is to devote the leftmost bit to the sign and the remaining bits to the magnitude. The representation is easy for people to read but has two defects. Zero has two representations, plus zero and minus zero. And arithmetic becomes awkward: to add two numbers of opposite sign, a circuit must compare the magnitudes, subtract the smaller from the larger, and select the sign of the result. A representation that complicates addition is a poor choice of law in the sense introduced earlier. Sign and magnitude nonetheless survives in the mantissa of floating-point numbers, as Lecture 06 shows.
 UNDERSTAND NOW: sign and magnitude.
 For the lecturer: Simple for people, awkward for circuits. It survives in the mantissa of IEEE 754 floating-point numbers (Lecture 06).</a:t>
             </a:r>
@@ -751,7 +751,7 @@
           <a:p>
             <a:r>
               <a:rPr lang="en-US" dirty="0"/>
-              <a:t>Two's complement. Non-negative numbers are represented by themselves. A negative number x is represented by 2 to the n minus its magnitude: on four bits, minus 3 is 16 minus 3, that is 13, 1101. The range is not symmetric: from minus 2 to the n minus 1 up to 2 to the n minus 1, minus 1, so on four bits from minus 8 to plus 7. Zero has one representation only, and the leftmost bit is 1 exactly when the number is negative. For a 32-bit register the range is about minus two billion to plus two billion.
+              <a:t>Two's complement. Non-negative numbers are represented by themselves; a negative number x is represented by 2^n - |x|, so that on four bits -3 is represented by 16 - 3 = 13, that is 1101. The range is asymmetric, from -2^(n-1) to 2^(n-1) - 1, hence from -8 to +7 on four bits. Zero has a unique representation, and the leftmost bit is 1 exactly when the number is negative. For a 32-bit register the range extends from about minus two billion to plus two billion. This is the representation used by every modern processor, RISC-V included.
 UNDERSTAND NOW: two's complement.
 For the lecturer: Also called radix complement (complemento alla base). The asymmetry of the range (one more negative number) has a consequence: negating the most negative number overflows.</a:t>
             </a:r>
@@ -841,7 +841,7 @@
           <a:p>
             <a:r>
               <a:rPr lang="en-US" dirty="0"/>
-              <a:t>The same sixteen patterns read in three ways. In the left table, where the leftmost bit is 0, the three readings agree. In the right table they differ: 1000 is 8 as unsigned, minus zero in sign and magnitude, and minus 8 in two's complement; 1111 is 15, minus 7 or minus 1. The sentence at the bottom is the key to the whole lecture: the bits do not say which column is right. The program says it, through the instructions it chooses.
+              <a:t>The same sixteen patterns read according to three laws. In the left table, where the leftmost bit is 0, the three readings coincide. In the right table they diverge: 1000 is 8 unsigned, minus zero in sign and magnitude, and -8 in two's complement; 1111 is 15, -7 or -1. The sentence at the bottom is the key to the entire lecture: the bits do not indicate which column is correct. The program indicates it, through the instructions it chooses to apply to them.
 UNDERSTAND NOW: two's complement.
 For the lecturer: Highlighted: 1000 is minus zero in sign and magnitude but -8 in two's complement; 1111 is -7 or -1. One's complement and excess-8 are added to this table in Lecture 06.</a:t>
             </a:r>
@@ -931,7 +931,7 @@
           <a:p>
             <a:r>
               <a:rPr lang="en-US" dirty="0"/>
-              <a:t>With n bits the numbers form a circle: after the last pattern comes the first. Adding 1 moves one step clockwise. The inner ring gives the unsigned value, the outer discs the value in two's complement. The wheel "breaks" in two different places. For the unsigned reading the break is at the top, between 1111 and 0000: crossing it is a carry. For two's complement it is at the bottom, between 0111 and 1000: crossing it is a signed overflow. And one step back from 0000 is 1111: this is the FFFFFFFF of the warm-up.
+              <a:t>With n bits the numbers form a circle: the last pattern is followed by the first, because arithmetic is performed modulo 2^n. Adding 1 moves one step clockwise. The inner ring shows the unsigned value, the outer discs the two's complement value. The circle is "broken" at two different points. For the unsigned reading the discontinuity lies at the top, between 1111 and 0000, and crossing it is a carry. For two's complement it lies at the bottom, between 0111 and 1000, and crossing it is a signed overflow. One step back from 0000 reaches 1111: this is precisely the FFFFFFFF of the warm-up.
 UNDERSTAND NOW: two's complement.
 For the lecturer: Inner ring: unsigned value. Middle: bits. Outer discs: two's complement value. The same adder serves both readings: only the place where the wheel 'breaks' changes.</a:t>
             </a:r>
@@ -1021,7 +1021,7 @@
           <a:p>
             <a:r>
               <a:rPr lang="en-US" dirty="0"/>
-              <a:t>Three calculations that show the advantage of two's complement. To add 2 and minus 6, simply add the two patterns: 0010 plus 1010 is 1100, which reads minus 4. To add two negative numbers, add the patterns and discard the carry out of the leftmost position. Even the product works on the low four bits. The first row of bullets is the point: the adder does not need to know the signs. The circuit that adds natural numbers already gives the right answer for signed ones.
+              <a:t>Three calculations exhibit the decisive advantage of two's complement. To add 2 and -6, one simply adds the two patterns: 0010 plus 1010 is 1100, which reads -4. To add two negative numbers, one adds the patterns and discards the carry out of the leftmost position. Even the low four bits of the product are correct. The first line of bullets states the consequence: the adder need not know the signs of its operands. The circuit that adds natural numbers already yields the correct result for signed ones, so a single adder serves both.
 UNDERSTAND NOW: two's complement.
 For the lecturer: Check of the product: 2 x 13 = 26 = 1 1010; the low four bits are 1010, which reads -6. This is why RISC-V has a single mul for signed and unsigned operands.</a:t>
             </a:r>
@@ -1111,7 +1111,7 @@
           <a:p>
             <a:r>
               <a:rPr lang="en-US" dirty="0"/>
-              <a:t>There are two overflows, and they are independent. For unsigned numbers, overflow is a carry out of the leftmost bit: 128 plus 130 on eight bits leaves 2 in the register. For signed numbers, overflow is a result with the wrong sign: 127 plus 127 produces no carry out, but the pattern reads minus 2. The rule: two positive operands that give a negative sum, or two negative ones that give a positive sum. Two operands of opposite sign can never overflow, because the result lies between them.
+              <a:t>There are two distinct notions of overflow, and they are independent. For unsigned numbers, overflow is a carry out of the leftmost bit: 128 plus 130 on eight bits leaves 2 in the register. For signed numbers, overflow is a result of the wrong sign: 127 plus 127 produces no carry out, yet the pattern reads -2. The rule follows: two positive operands yielding a negative sum, or two negative operands yielding a positive sum. Operands of opposite sign can never overflow, because the exact result lies between them and is therefore representable.
 UNDERSTAND NOW: two's complement.
 For the lecturer: Equivalent circuit rule for signed overflow: the carry into the most significant bit differs from the carry out of it.</a:t>
             </a:r>
@@ -1201,7 +1201,7 @@
           <a:p>
             <a:r>
               <a:rPr lang="en-US" dirty="0"/>
-              <a:t>How is a number moved to more bits without changing its value? For two's complement, copy the sign bit into all the new positions: minus 1 on four bits, 1111, becomes 1111 1111 on eight; plus 5, 0101, becomes 0000 0101. This is sign extension. The processor does it whenever a short value meets a long one: the twelve-bit constant of addi is sign-extended to thirty-two bits, and lb sign-extends the byte it loads, while lbu fills with zeros.
+              <a:t>How can a number be widened to more bits without changing its value? In two's complement, by copying the sign bit into every new position: -1 on four bits, 1111, becomes 1111 1111 on eight; +5, 0101, becomes 0000 0101. This is sign extension. The processor performs it whenever a narrow value meets a wide one: the twelve-bit immediate of addi is sign-extended to thirty-two bits, and lb sign-extends the byte it loads, whereas lbu fills the upper bits with zeros. The choice between the two loads is a statement about what the byte means.
 UNDERSTAND NOW: sign extension.
 For the lecturer: Extending with zeros would turn 1111 (-1) into 0000 1111 (+15). Sign extension is the signed counterpart of the 'extension on the left' property seen for naturals.</a:t>
             </a:r>
@@ -1291,8 +1291,8 @@
           <a:p>
             <a:r>
               <a:rPr lang="en-US" dirty="0"/>
-              <a:t>The leftmost bit is 1, so the number is negative: discard 252, which is the unsigned reading. To find the magnitude, change the sign: complement, 0000 0011, and add one, 0000 0100, which is 4. The pattern is minus 4.
-On eight bits in two's complement the range is from minus 128 to plus 127. Compute each sum and see whether it falls in the range. Remember that operands of opposite sign cannot overflow, which excludes two options at once.
+              <a:t>For the first question, the leftmost bit is 1, so the number is negative, and 252, the unsigned reading, is to be discarded. The magnitude is found by negation: complementing gives 0000 0011, and adding one gives 0000 0100, which is 4. The pattern therefore represents -4.
+For the second, the eight-bit two's complement range runs from -128 to +127. Each sum is computed and compared with the range. Recalling that operands of opposite sign cannot overflow eliminates two options at once.
 For the lecturer: 1. Answer: B. Complement and add one: 0000 0011 + 1 = 0000 0100 = 4, so the pattern is -4. (252 is its unsigned reading.)
 2. Answer: B. The range is [-128, 127]. 100 + 27 = 127 fits; 100 + 28 = 128 does not: two positives give a negative pattern (1000 0000 = -128).</a:t>
             </a:r>
@@ -1382,8 +1382,8 @@
           <a:p>
             <a:r>
               <a:rPr lang="en-US" dirty="0"/>
-              <a:t>The same two registers, two instructions that differ by one letter. slt reads FFFFFFFF as minus 1, which is less than 1. sltu reads it as more than four billion, which is not. This question is the whole lecture in one line.
-Use repeated multiplication: 0.625 times 2 is 1.25, digit 1; 0.25 times 2 is 0.5, digit 0; 0.5 times 2 is 1.0, digit 1. Check with the weights: one half plus one eighth is 0.625.
+              <a:t>For the first question: the same two registers, and two instructions that differ by a single letter. slt interprets FFFFFFFF as -1, which is less than 1; sltu interprets it as a value above four billion, which is not. The question condenses the entire lecture into one line.
+For the second, repeated multiplication is applied: 0.625 times 2 is 1.25, digit 1; 0.25 times 2 is 0.5, digit 0; 0.5 times 2 is 1.0, digit 1. The result is verified with the positional weights: one half plus one eighth is 0.625.
 For the lecturer: 1. Answer: C. Signed: -1 &lt; 1 is true, so t2 = 1. Unsigned: 4,294,967,295 &lt; 1 is false, so t3 = 0.
 2. Answer: A. 0.625 x 2 = 1.25 (1); 0.25 x 2 = 0.5 (0); 0.5 x 2 = 1.0 (1): 0.101 = 1/2 + 1/8.</a:t>
             </a:r>
@@ -1473,7 +1473,7 @@
           <a:p>
             <a:r>
               <a:rPr lang="en-US" dirty="0"/>
-              <a:t>Twelve terms. Signed integer is in Italian numero relativo or intero con segno. Carry and borrow are the digit carried in an addition and the one borrowed in a subtraction. Sign extension is the operation that widens a signed number. To clamp has no single Italian word: it means to limit a value to an interval.</a:t>
+              <a:t>Twelve terms. Signed integer is rendered in Italian as numero relativo or intero con segno. Carry and borrow denote the digit carried in addition and the digit borrowed in subtraction. Sign extension is the operation that widens a signed number while preserving its value. To clamp has no single Italian equivalent: it means to constrain a value to an interval.</a:t>
             </a:r>
             <a:endParaRPr lang="en-US" dirty="0"/>
           </a:p>
@@ -1561,7 +1561,7 @@
           <a:p>
             <a:r>
               <a:rPr lang="en-US" dirty="0"/>
-              <a:t>Six objectives. The first three are skills on paper: converting between bases 2, 8, 10 and 16, saying which naturals fit in n bits, and encoding signed integers in two ways. The fourth is arithmetic: adding, subtracting and negating in two's complement, and recognising an overflow. The last two return to the machine: explaining the FFFFFFFF of the warm-up, and choosing the RISC-V instruction that reads the same bits as signed or as unsigned.</a:t>
+              <a:t>Six learning outcomes. The first three are skills exercised on paper: converting between bases 2, 8, 10 and 16, determining which natural numbers fit in n bits, and encoding signed integers in two representations. The fourth concerns arithmetic: addition, subtraction and negation in two's complement, together with the detection of overflow. The last two return to the machine: explaining the FFFFFFFF of the warm-up, and choosing the RISC-V instruction that interprets the same bits as signed or as unsigned.</a:t>
             </a:r>
             <a:endParaRPr lang="en-US" dirty="0"/>
           </a:p>
@@ -1649,7 +1649,7 @@
           <a:p>
             <a:r>
               <a:rPr lang="en-US" dirty="0"/>
-              <a:t>Five conclusions. Each base has its use: two for circuits, sixteen for people who read bits. With n bits there are 2 to the n numbers, and the encoding law says which. Two's complement turns subtraction into addition. Overflow is the price of finite registers: detect it, or design it away as with the clamp. And in RISC-V the bits have no type: the instruction chooses. The next lecture completes the picture with the real numbers.
+              <a:t>Five conclusions. Each base has its purpose: base two for circuits, base sixteen for people who read bits. With n bits exactly 2^n numbers are representable, and the encoding law determines which. Two's complement reduces subtraction to addition, so that one adder serves signed and unsigned arithmetic alike. Overflow is the price of finite registers: it must be detected, or designed away, as the clamp does. And in RISC-V bits carry no type: the instruction decides how they are read. The next lecture completes the picture with the representation of real numbers.
 Learning status, recap. UNDERSTAND NOW: two's complement; base conversions; naturals and overflow; shifts as multiplications; sign and magnitude; signed or unsigned instructions; sign extension. USE NOW: the PRG32 runtime calls, the complete program, the PRG32 tools (used, not studied, in this course). UNDERSTAND LATER: nothing. A slide without a badge is context: a story, an example, a question, an exercise.
 For the lecturer: Next lecture: one's complement, excess-k, fixed point and IEEE 754 floating point.</a:t>
             </a:r>
@@ -1739,7 +1739,7 @@
           <a:p>
             <a:r>
               <a:rPr lang="en-US" dirty="0"/>
-              <a:t>A positional system with base b uses b digits, from 0 to b minus 1, and the value of a number is the sum of each digit times the power of b that corresponds to its position: the formula in the caption. The table shows thirteen in four bases: 1101 in binary, 15 in octal, 13 in decimal, D in hexadecimal. It is always the same number: only its writing changes. Base 10 has no special status for a machine; it is the base of people with ten fingers.
+              <a:t>A positional system of base b uses b digits, from 0 to b - 1, and the value of a numeral is the sum of each digit multiplied by the power of b corresponding to its position, as the formula in the caption states. The table writes thirteen in four bases: 1101 in binary, 15 in octal, 13 in decimal, D in hexadecimal. The number is the same in every case; only its notation changes. Base ten enjoys no privilege for a machine: it is merely the base of a species with ten fingers.
 UNDERSTAND NOW: base conversions.
 For the lecturer: A number N is a string of digits d(n-1) ... d(1) d(0), each smaller than the base b. The value is the sum of each digit times the power of the base of its position.</a:t>
             </a:r>
@@ -1829,7 +1829,7 @@
           <a:p>
             <a:r>
               <a:rPr lang="en-US" dirty="0"/>
-              <a:t>Bases that are powers of two share the same bits. The slide takes 127, writes it in binary, and groups the bits from the right: in fours, each group is one hexadecimal digit, giving 7F; in threes, each group is one octal digit, giving 177. No division is needed, only a table lookup. Two details: always group from the right, the least significant end, and pad the leftmost group with zeros if it is incomplete.
+              <a:t>Bases that are powers of two share the same underlying bits, which makes conversion among them purely a matter of regrouping. The slide writes 127 in binary and groups its bits from the right: groups of four give the hexadecimal digits, 7F; groups of three give the octal digits, 177. No division is required, only a table lookup. Two details must be respected: grouping always starts from the right, the least significant end, and the leftmost group is padded with zeros if incomplete.
 UNDERSTAND NOW: base conversions.
 For the lecturer: Group from the right (the least significant end) and pad with zeros on the left.</a:t>
             </a:r>
@@ -1919,7 +1919,7 @@
           <a:p>
             <a:r>
               <a:rPr lang="en-US" dirty="0"/>
-              <a:t>To convert an integer from base 10 to base r, divide by r repeatedly: each remainder is a digit, and the quotient is divided again until it becomes zero. The three tables do it for 127 with r equal to 8, 16 and 2. The yellow box holds the detail that is most often got wrong: the first remainder is the least significant digit, so the remainders must be read from the bottom up. Check: 177 in octal is 64 + 56 + 7 = 127.
+              <a:t>To convert an integer from base ten to base r, one divides by r repeatedly: each remainder is a digit, and the quotient is divided again until it reaches zero. The three tables perform the procedure for 127 with r equal to 8, 16 and 2. The highlighted box addresses the most frequent error: the first remainder is the least significant digit, so the remainders must be read from the bottom upwards. The result can always be checked by evaluating it positionally: 177 in octal is 64 + 56 + 7 = 127.
 UNDERSTAND NOW: base conversions.
 For the lecturer: N = Q(n) r^(n+1) + R(n) r^n + ... + R(1) r + R(0). In C the two operations are / and %; in RISC-V (M extension) they are divu and remu.</a:t>
             </a:r>
@@ -2009,7 +2009,7 @@
           <a:p>
             <a:r>
               <a:rPr lang="en-US" dirty="0"/>
-              <a:t>For a number between 0 and 1 the procedure is the mirror image: multiply by r repeatedly; each time the integer part of the product is a digit, starting from the most significant, and the fractional part is multiplied again. 0.875 gives 0.111 and stops, because the fraction becomes zero. 0.8 never stops: the same fractions return, and the digits 1100 repeat for ever. A number that is finite in base ten can be periodic in base two, and with a finite number of bits it must be cut. This is the origin of the rounding errors of Lecture 06.
+              <a:t>For a number between 0 and 1 the procedure is the mirror image: one multiplies by r repeatedly, and at each step the integer part of the product is a digit, starting from the most significant, while the fractional part is multiplied again. 0.875 yields 0.111 and terminates, because the fraction becomes zero. 0.8 never terminates: the same fractions recur and the digits 1100 repeat indefinitely. A number with a finite representation in base ten may thus be periodic in base two, and a finite number of bits must truncate it. This is the origin of the rounding errors studied in Lecture 06.
 UNDERSTAND NOW: base conversions.
 For the lecturer: N = R(1) r^-1 + R(2) r^-2 + ... The source slides linked two online converters (fermimn.edu.it and fauser.edu); any modern calculator in programmer mode does the same.</a:t>
             </a:r>
@@ -2099,7 +2099,7 @@
           <a:p>
             <a:r>
               <a:rPr lang="en-US" dirty="0"/>
-              <a:t>For natural numbers the law is the simplest possible: X is x written in binary. With n bits there are 2 to the n patterns, so the numbers go from 0 to 2 to the n minus 1: with four bits, from 0 to 15, as the strip shows. The table gives the cases you meet on RISC-V: a byte reaches 255, a halfword 65,535, a word 4,294,967,295. The last is the unsigned reading of FFFFFFFF: half of the answer to the warm-up.
+              <a:t>For natural numbers the representation law is the simplest possible: X is x written in binary. With n bits there are 2^n patterns, so the representable range is 0 to 2^n - 1, from 0 to 15 for four bits as the strip shows. The table gives the sizes that occur on RISC-V: a byte reaches 255, a halfword 65,535, a word 4,294,967,295. The last value is the unsigned reading of FFFFFFFF, and thus half of the answer to the warm-up.
 UNDERSTAND NOW: naturals and overflow.
 For the lecturer: 4,294,967,295 is the unsigned reading of 0xFFFFFFFF: the first half of the answer to the warm-up.</a:t>
             </a:r>
@@ -2189,7 +2189,7 @@
           <a:p>
             <a:r>
               <a:rPr lang="en-US" dirty="0"/>
-              <a:t>The definition to remember. A register has a finite number of bits, so it represents a finite subset of an infinite set of numbers. The arithmetic operations are closed on the whole set, not on the subset: the sum of two representable numbers may fall outside. When this happens there is an overflow. The example uses seven bits, which cover 0 to 127: 100 and 38 are both representable, and their sum, 138, is not. Overflow is not a fault of the machine: it is a consequence of finiteness.
+              <a:t>The definition to retain. A register has a finite number of bits and therefore represents a finite subset of an infinite set of numbers. The arithmetic operations are closed over the whole set but not over the subset: the sum of two representable numbers may fall outside it, and when it does an overflow has occurred. The example uses seven bits, which cover 0 to 127: 100 and 38 are both representable, while their sum, 138, is not. Overflow is not a malfunction of the machine; it is a necessary consequence of finiteness, and the engineering question is how to detect or avoid it.
 UNDERSTAND NOW: naturals and overflow.</a:t>
             </a:r>
             <a:endParaRPr lang="en-US" dirty="0"/>
@@ -2278,7 +2278,7 @@
           <a:p>
             <a:r>
               <a:rPr lang="en-US" dirty="0"/>
-              <a:t>Four calculations on four bits, done column by column as in decimal: 1 plus 1 is 0 with a carry of 1. Six plus eight fits. Fourteen plus three gives seventeen, which needs a fifth bit: an overflow. The difference borrows as in decimal. The product of two numbers of n bits may need 2n bits, which is why RISC-V has two instructions: mul for the low half of the product and mulhu for the high half. Redo the four calculations by hand, covering the results.
+              <a:t>Four calculations on four bits, performed column by column exactly as in decimal: 1 plus 1 gives 0 with a carry of 1. Six plus eight fits. Fourteen plus three yields seventeen, which requires a fifth bit: an overflow. Subtraction borrows as in decimal. The product of two n-bit numbers may require 2n bits, which is why RISC-V provides two instructions, mul for the low half of the product and mulhu for the high half. The four calculations are worth redoing by hand with the results covered.
 UNDERSTAND NOW: naturals and overflow.
 For the lecturer: The source slide said the overflow 'can be detected through the overflow bit': true of processors with a flags register, not of RISC-V. See the last section.</a:t>
             </a:r>
@@ -3358,7 +3358,7 @@
                 <a:ea typeface="Calibri" pitchFamily="34" charset="-122"/>
                 <a:cs typeface="Calibri" pitchFamily="34" charset="-120"/>
               </a:rPr>
-              <a:t>05-Computer_Architecture-Number_Representation_Integers-Code.pptx</a:t>
+              <a:t>05-Computer_Architecture-Number_Representation_Integers-Lab.pptx</a:t>
             </a:r>
             <a:endParaRPr lang="en-US" sz="1300" dirty="0"/>
           </a:p>

--- a/en/slides/05-Computer_Architecture-Number_Representation_Integers.pptx
+++ b/en/slides/05-Computer_Architecture-Number_Representation_Integers.pptx
@@ -126,13 +126,13 @@
   <p:extLst>
     <p:ext uri="{521415D9-36F7-43E2-AB2F-B90AF26B5E84}">
       <p14:sectionLst xmlns:p14="http://schemas.microsoft.com/office/powerpoint/2010/main">
-        <p14:section name="Opening" id="{beaeb916-4d6a-2011-998b-16b1bc45d0ae}">
+        <p14:section name="Opening" id="{cae4efc1-db4d-33b4-28bd-a22dc546283a}">
           <p14:sldIdLst>
             <p14:sldId id="256"/>
             <p14:sldId id="257"/>
           </p14:sldIdLst>
         </p14:section>
-        <p14:section name="Bases and conversions" id="{59e6a70d-fe77-754f-1ad3-7261f9974d98}">
+        <p14:section name="Bases and conversions" id="{2bacd51d-f609-b96b-9aa0-dbe1ac6d07f7}">
           <p14:sldIdLst>
             <p14:sldId id="258"/>
             <p14:sldId id="259"/>
@@ -140,14 +140,14 @@
             <p14:sldId id="261"/>
           </p14:sldIdLst>
         </p14:section>
-        <p14:section name="Natural numbers and overflow" id="{51f7baa9-a593-0bca-30e7-91a660c9c9a6}">
+        <p14:section name="Natural numbers and overflow" id="{94e22095-7166-1acd-72ae-c110b8bf370d}">
           <p14:sldIdLst>
             <p14:sldId id="262"/>
             <p14:sldId id="263"/>
             <p14:sldId id="264"/>
           </p14:sldIdLst>
         </p14:section>
-        <p14:section name="Signed integers" id="{67020e5e-f924-b31b-e941-6d372b7bba46}">
+        <p14:section name="Signed integers" id="{332a31a0-89b2-0e6c-81b8-a1d9a5e3cc92}">
           <p14:sldIdLst>
             <p14:sldId id="265"/>
             <p14:sldId id="266"/>
@@ -157,7 +157,7 @@
             <p14:sldId id="270"/>
           </p14:sldIdLst>
         </p14:section>
-        <p14:section name="Back to the machine" id="{c1f4f005-8d79-382c-921f-0b6ab45059b5}">
+        <p14:section name="Back to the machine" id="{6fd60dce-7f88-f3e4-37fc-d3d698a6bc66}">
           <p14:sldIdLst>
             <p14:sldId id="271"/>
             <p14:sldId id="272"/>

--- a/en/slides/05-Computer_Architecture-Number_Representation_Integers.pptx
+++ b/en/slides/05-Computer_Architecture-Number_Representation_Integers.pptx
@@ -126,13 +126,13 @@
   <p:extLst>
     <p:ext uri="{521415D9-36F7-43E2-AB2F-B90AF26B5E84}">
       <p14:sectionLst xmlns:p14="http://schemas.microsoft.com/office/powerpoint/2010/main">
-        <p14:section name="Opening" id="{cae4efc1-db4d-33b4-28bd-a22dc546283a}">
+        <p14:section name="Opening" id="{74666048-a044-06d8-599a-06a3a9ffa71c}">
           <p14:sldIdLst>
             <p14:sldId id="256"/>
             <p14:sldId id="257"/>
           </p14:sldIdLst>
         </p14:section>
-        <p14:section name="Bases and conversions" id="{2bacd51d-f609-b96b-9aa0-dbe1ac6d07f7}">
+        <p14:section name="Bases and conversions" id="{34da6e0a-56e7-a77c-bcec-261e25faf079}">
           <p14:sldIdLst>
             <p14:sldId id="258"/>
             <p14:sldId id="259"/>
@@ -140,14 +140,14 @@
             <p14:sldId id="261"/>
           </p14:sldIdLst>
         </p14:section>
-        <p14:section name="Natural numbers and overflow" id="{94e22095-7166-1acd-72ae-c110b8bf370d}">
+        <p14:section name="Natural numbers and overflow" id="{bb93e0af-5c17-6b56-4476-dfc74322030a}">
           <p14:sldIdLst>
             <p14:sldId id="262"/>
             <p14:sldId id="263"/>
             <p14:sldId id="264"/>
           </p14:sldIdLst>
         </p14:section>
-        <p14:section name="Signed integers" id="{332a31a0-89b2-0e6c-81b8-a1d9a5e3cc92}">
+        <p14:section name="Signed integers" id="{f0b79f6c-66e2-623e-3654-0178111d5d55}">
           <p14:sldIdLst>
             <p14:sldId id="265"/>
             <p14:sldId id="266"/>
@@ -157,7 +157,7 @@
             <p14:sldId id="270"/>
           </p14:sldIdLst>
         </p14:section>
-        <p14:section name="Back to the machine" id="{6fd60dce-7f88-f3e4-37fc-d3d698a6bc66}">
+        <p14:section name="Back to the machine" id="{2be7dfac-13cd-350f-7730-02b8eb1d1678}">
           <p14:sldIdLst>
             <p14:sldId id="271"/>
             <p14:sldId id="272"/>
@@ -573,6 +573,7 @@
               <a:t>This lecture begins the formal treatment of numerical representation. It opens with a puzzle observed on the machine, a marker that moves left past zero and displays FFFFFFFF, and closes by explaining it completely. Between the two, the student learns to convert between bases, to determine which numbers a given number of bits can represent, and to encode negative numbers. The epigraph from Trilussa, in which the One mocks the Zero, carries a precise mathematical point: in a positional system the zero, worthless on its own, gives every other digit its weight.
 Learning status: UNDERSTAND NOW, by the end of this lecture you explain it, trace it and apply it on your own; USE NOW, you follow and use the recipe today; how it works inside is explained later, or is not part of the course; UNDERSTAND LATER, recognise the name and what it is for; a later lecture explains it. A slide without a badge is context: a story, an example, a question, an exercise.
 Learning status of this lecture. UNDERSTAND NOW: two's complement; base conversions; naturals and overflow; shifts as multiplications; sign and magnitude; signed or unsigned instructions; sign extension. USE NOW: the PRG32 runtime calls, the complete program, the PRG32 tools (used, not studied, in this course). UNDERSTAND LATER: nothing. A slide without a badge is context: a story, an example, a question, an exercise.
+Roadmap. Today's outcomes: (1) convert between bases and read an n-bit pattern as unsigned and as two's complement; (2) recognise overflow in unsigned and in signed addition; (3) choose between signed and unsigned instructions, including lb and lbu. Builds on: only what Lecture 01 set up. Next: Lecture 06, Number Representation: Real Numbers.
 For the lecturer: Original quotation (Romanesco): «Conterò poco, è vero: - diceva l'Uno ar Zero - ma tu che vali? Gnente: propio gnente.» Spiral: the lecture opens with the marker of textbook lab 06 moving left past zero, and closes by explaining it.</a:t>
             </a:r>
             <a:endParaRPr lang="en-US" dirty="0"/>
@@ -1650,7 +1651,7 @@
             <a:r>
               <a:rPr lang="en-US" dirty="0"/>
               <a:t>Five conclusions. Each base has its purpose: base two for circuits, base sixteen for people who read bits. With n bits exactly 2^n numbers are representable, and the encoding law determines which. Two's complement reduces subtraction to addition, so that one adder serves signed and unsigned arithmetic alike. Overflow is the price of finite registers: it must be detected, or designed away, as the clamp does. And in RISC-V bits carry no type: the instruction decides how they are read. The next lecture completes the picture with the representation of real numbers.
-Learning status, recap. UNDERSTAND NOW: two's complement; base conversions; naturals and overflow; shifts as multiplications; sign and magnitude; signed or unsigned instructions; sign extension. USE NOW: the PRG32 runtime calls, the complete program, the PRG32 tools (used, not studied, in this course). UNDERSTAND LATER: nothing. A slide without a badge is context: a story, an example, a question, an exercise.
+Learning status, recap. UNDERSTAND NOW: two's complement; base conversions; naturals and overflow; shifts as multiplications; sign and magnitude; signed or unsigned instructions; sign extension. USE NOW: the PRG32 runtime calls, the complete program, the PRG32 tools (used, not studied, in this course). UNDERSTAND LATER: nothing. A slide without a badge is context: a story, an example, a question, an exercise. Closing thread: The 0xFFFFFFFF of a counter that went below zero is -1 in two's complement: the bits did not change, the reading did. Next: fractions on a chip with no floating-point unit. Exit ticket (two to four minutes, alone, on paper): 1. The byte 0xF6 is in memory. Which 32-bit value does lb leave in a register, and which does lbu leave? Which is right if the byte is a temperature of -10 degrees? 2. On 8 bits, compute 0111 1111 + 0000 0001. Read the result as an unsigned number and as a two's-complement number. Is there overflow in each reading?
 For the lecturer: Next lecture: one's complement, excess-k, fixed point and IEEE 754 floating point.</a:t>
             </a:r>
             <a:endParaRPr lang="en-US" dirty="0"/>
